--- a/manufacturing_microservices.pptx
+++ b/manufacturing_microservices.pptx
@@ -5,7 +5,7 @@
     <p:sldMasterId id="2147483648" r:id="rId1"/>
   </p:sldMasterIdLst>
   <p:notesMasterIdLst>
-    <p:notesMasterId r:id="rId12"/>
+    <p:notesMasterId r:id="rId13"/>
   </p:notesMasterIdLst>
   <p:sldIdLst>
     <p:sldId id="256" r:id="rId2"/>
@@ -18,6 +18,7 @@
     <p:sldId id="263" r:id="rId9"/>
     <p:sldId id="264" r:id="rId10"/>
     <p:sldId id="265" r:id="rId11"/>
+    <p:sldId id="266" r:id="rId12"/>
   </p:sldIdLst>
   <p:sldSz cx="12192000" cy="6858000"/>
   <p:notesSz cx="6858000" cy="12192000"/>
@@ -148,6 +149,7 @@
           <p14:sldIdLst>
             <p14:sldId id="264"/>
             <p14:sldId id="265"/>
+            <p14:sldId id="266"/>
           </p14:sldIdLst>
         </p14:section>
       </p14:sectionLst>
@@ -312,6 +314,13 @@
           </p:nvPr>
         </p:nvSpPr>
         <p:spPr/>
+        <p:txBody>
+          <a:bodyPr/>
+          <a:lstStyle/>
+          <a:p>
+            <a:endParaRPr lang="es-ES"/>
+          </a:p>
+        </p:txBody>
       </p:sp>
       <p:sp>
         <p:nvSpPr>
@@ -399,6 +408,13 @@
           </p:nvPr>
         </p:nvSpPr>
         <p:spPr/>
+        <p:txBody>
+          <a:bodyPr/>
+          <a:lstStyle/>
+          <a:p>
+            <a:endParaRPr lang="es-ES"/>
+          </a:p>
+        </p:txBody>
       </p:sp>
       <p:sp>
         <p:nvSpPr>
@@ -486,6 +502,13 @@
           </p:nvPr>
         </p:nvSpPr>
         <p:spPr/>
+        <p:txBody>
+          <a:bodyPr/>
+          <a:lstStyle/>
+          <a:p>
+            <a:endParaRPr lang="es-ES"/>
+          </a:p>
+        </p:txBody>
       </p:sp>
       <p:sp>
         <p:nvSpPr>
@@ -573,6 +596,13 @@
           </p:nvPr>
         </p:nvSpPr>
         <p:spPr/>
+        <p:txBody>
+          <a:bodyPr/>
+          <a:lstStyle/>
+          <a:p>
+            <a:endParaRPr lang="es-ES"/>
+          </a:p>
+        </p:txBody>
       </p:sp>
       <p:sp>
         <p:nvSpPr>
@@ -660,6 +690,13 @@
           </p:nvPr>
         </p:nvSpPr>
         <p:spPr/>
+        <p:txBody>
+          <a:bodyPr/>
+          <a:lstStyle/>
+          <a:p>
+            <a:endParaRPr lang="es-ES"/>
+          </a:p>
+        </p:txBody>
       </p:sp>
       <p:sp>
         <p:nvSpPr>
@@ -747,6 +784,13 @@
           </p:nvPr>
         </p:nvSpPr>
         <p:spPr/>
+        <p:txBody>
+          <a:bodyPr/>
+          <a:lstStyle/>
+          <a:p>
+            <a:endParaRPr lang="es-ES"/>
+          </a:p>
+        </p:txBody>
       </p:sp>
       <p:sp>
         <p:nvSpPr>
@@ -834,6 +878,13 @@
           </p:nvPr>
         </p:nvSpPr>
         <p:spPr/>
+        <p:txBody>
+          <a:bodyPr/>
+          <a:lstStyle/>
+          <a:p>
+            <a:endParaRPr lang="es-ES"/>
+          </a:p>
+        </p:txBody>
       </p:sp>
       <p:sp>
         <p:nvSpPr>
@@ -921,6 +972,13 @@
           </p:nvPr>
         </p:nvSpPr>
         <p:spPr/>
+        <p:txBody>
+          <a:bodyPr/>
+          <a:lstStyle/>
+          <a:p>
+            <a:endParaRPr lang="es-ES"/>
+          </a:p>
+        </p:txBody>
       </p:sp>
       <p:sp>
         <p:nvSpPr>
@@ -1008,6 +1066,13 @@
           </p:nvPr>
         </p:nvSpPr>
         <p:spPr/>
+        <p:txBody>
+          <a:bodyPr/>
+          <a:lstStyle/>
+          <a:p>
+            <a:endParaRPr lang="es-ES"/>
+          </a:p>
+        </p:txBody>
       </p:sp>
       <p:sp>
         <p:nvSpPr>
@@ -1095,6 +1160,13 @@
           </p:nvPr>
         </p:nvSpPr>
         <p:spPr/>
+        <p:txBody>
+          <a:bodyPr/>
+          <a:lstStyle/>
+          <a:p>
+            <a:endParaRPr lang="es-ES"/>
+          </a:p>
+        </p:txBody>
       </p:sp>
       <p:sp>
         <p:nvSpPr>
@@ -1421,7 +1493,7 @@
           </a:prstGeom>
           <a:extLst>
             <a:ext uri="{C572A759-6A51-4108-AA02-DFA0A04FC94B}">
-              <ma14:wrappingTextBoxFlag xmlns:ma14="http://schemas.microsoft.com/office/mac/drawingml/2011/main" xmlns="" val="0"/>
+              <ma14:wrappingTextBoxFlag xmlns="" xmlns:ma14="http://schemas.microsoft.com/office/mac/drawingml/2011/main" val="0"/>
             </a:ext>
           </a:extLst>
         </p:spPr>
@@ -1570,7 +1642,7 @@
           </a:prstGeom>
           <a:extLst>
             <a:ext uri="{C572A759-6A51-4108-AA02-DFA0A04FC94B}">
-              <ma14:wrappingTextBoxFlag xmlns:ma14="http://schemas.microsoft.com/office/mac/drawingml/2011/main" xmlns="" val="0"/>
+              <ma14:wrappingTextBoxFlag xmlns="" xmlns:ma14="http://schemas.microsoft.com/office/mac/drawingml/2011/main" val="0"/>
             </a:ext>
           </a:extLst>
         </p:spPr>
@@ -3142,6 +3214,69 @@
 </p:sld>
 </file>
 
+<file path=ppt/slides/slide11.xml><?xml version="1.0" encoding="utf-8"?>
+<p:sld xmlns:a="http://schemas.openxmlformats.org/drawingml/2006/main" xmlns:r="http://schemas.openxmlformats.org/officeDocument/2006/relationships" xmlns:p="http://schemas.openxmlformats.org/presentationml/2006/main">
+  <p:cSld>
+    <p:spTree>
+      <p:nvGrpSpPr>
+        <p:cNvPr id="1" name=""/>
+        <p:cNvGrpSpPr/>
+        <p:nvPr/>
+      </p:nvGrpSpPr>
+      <p:grpSpPr>
+        <a:xfrm>
+          <a:off x="0" y="0"/>
+          <a:ext cx="0" cy="0"/>
+          <a:chOff x="0" y="0"/>
+          <a:chExt cx="0" cy="0"/>
+        </a:xfrm>
+      </p:grpSpPr>
+      <p:sp>
+        <p:nvSpPr>
+          <p:cNvPr id="2" name="Título 1">
+            <a:extLst>
+              <a:ext uri="{FF2B5EF4-FFF2-40B4-BE49-F238E27FC236}">
+                <a16:creationId xmlns:a16="http://schemas.microsoft.com/office/drawing/2014/main" id="{7D795850-124B-5DA0-74E8-1CD3C2E0F39A}"/>
+              </a:ext>
+            </a:extLst>
+          </p:cNvPr>
+          <p:cNvSpPr>
+            <a:spLocks noGrp="1"/>
+          </p:cNvSpPr>
+          <p:nvPr>
+            <p:ph type="title" idx="100"/>
+          </p:nvPr>
+        </p:nvSpPr>
+        <p:spPr>
+          <a:xfrm>
+            <a:off x="2946238" y="2672887"/>
+            <a:ext cx="6299524" cy="1512225"/>
+          </a:xfrm>
+        </p:spPr>
+        <p:txBody>
+          <a:bodyPr/>
+          <a:lstStyle/>
+          <a:p>
+            <a:r>
+              <a:rPr lang="es-ES" sz="8000" dirty="0"/>
+              <a:t>Questions?</a:t>
+            </a:r>
+          </a:p>
+        </p:txBody>
+      </p:sp>
+    </p:spTree>
+    <p:extLst>
+      <p:ext uri="{BB962C8B-B14F-4D97-AF65-F5344CB8AC3E}">
+        <p14:creationId xmlns:p14="http://schemas.microsoft.com/office/powerpoint/2010/main" val="4187412274"/>
+      </p:ext>
+    </p:extLst>
+  </p:cSld>
+  <p:clrMapOvr>
+    <a:masterClrMapping/>
+  </p:clrMapOvr>
+</p:sld>
+</file>
+
 <file path=ppt/slides/slide2.xml><?xml version="1.0" encoding="utf-8"?>
 <p:sld xmlns:a="http://schemas.openxmlformats.org/drawingml/2006/main" xmlns:r="http://schemas.openxmlformats.org/officeDocument/2006/relationships" xmlns:p="http://schemas.openxmlformats.org/presentationml/2006/main">
   <p:cSld name="Slide 2">
@@ -4473,7 +4608,7 @@
           </a:prstGeom>
           <a:extLst>
             <a:ext uri="{C572A759-6A51-4108-AA02-DFA0A04FC94B}">
-              <ma14:wrappingTextBoxFlag xmlns:ma14="http://schemas.microsoft.com/office/mac/drawingml/2011/main" xmlns="" val="0"/>
+              <ma14:wrappingTextBoxFlag xmlns="" xmlns:ma14="http://schemas.microsoft.com/office/mac/drawingml/2011/main" val="0"/>
             </a:ext>
           </a:extLst>
         </p:spPr>
@@ -10448,7 +10583,7 @@
           </a:prstGeom>
           <a:extLst>
             <a:ext uri="{C572A759-6A51-4108-AA02-DFA0A04FC94B}">
-              <ma14:wrappingTextBoxFlag xmlns:ma14="http://schemas.microsoft.com/office/mac/drawingml/2011/main" xmlns="" val="0"/>
+              <ma14:wrappingTextBoxFlag xmlns="" xmlns:ma14="http://schemas.microsoft.com/office/mac/drawingml/2011/main" val="0"/>
             </a:ext>
           </a:extLst>
         </p:spPr>
@@ -16358,7 +16493,7 @@
           </a:prstGeom>
           <a:extLst>
             <a:ext uri="{C572A759-6A51-4108-AA02-DFA0A04FC94B}">
-              <ma14:wrappingTextBoxFlag xmlns:ma14="http://schemas.microsoft.com/office/mac/drawingml/2011/main" xmlns="" val="0"/>
+              <ma14:wrappingTextBoxFlag xmlns="" xmlns:ma14="http://schemas.microsoft.com/office/mac/drawingml/2011/main" val="0"/>
             </a:ext>
           </a:extLst>
         </p:spPr>
@@ -16492,7 +16627,7 @@
           </a:prstGeom>
           <a:extLst>
             <a:ext uri="{C572A759-6A51-4108-AA02-DFA0A04FC94B}">
-              <ma14:wrappingTextBoxFlag xmlns:ma14="http://schemas.microsoft.com/office/mac/drawingml/2011/main" xmlns="" val="0"/>
+              <ma14:wrappingTextBoxFlag xmlns="" xmlns:ma14="http://schemas.microsoft.com/office/mac/drawingml/2011/main" val="0"/>
             </a:ext>
           </a:extLst>
         </p:spPr>
@@ -19133,7 +19268,7 @@
           </a:prstGeom>
           <a:extLst>
             <a:ext uri="{C572A759-6A51-4108-AA02-DFA0A04FC94B}">
-              <ma14:wrappingTextBoxFlag xmlns:ma14="http://schemas.microsoft.com/office/mac/drawingml/2011/main" xmlns="" val="0"/>
+              <ma14:wrappingTextBoxFlag xmlns="" xmlns:ma14="http://schemas.microsoft.com/office/mac/drawingml/2011/main" val="0"/>
             </a:ext>
           </a:extLst>
         </p:spPr>
@@ -20251,7 +20386,7 @@
           </a:prstGeom>
           <a:extLst>
             <a:ext uri="{C572A759-6A51-4108-AA02-DFA0A04FC94B}">
-              <ma14:wrappingTextBoxFlag xmlns:ma14="http://schemas.microsoft.com/office/mac/drawingml/2011/main" xmlns="" val="0"/>
+              <ma14:wrappingTextBoxFlag xmlns="" xmlns:ma14="http://schemas.microsoft.com/office/mac/drawingml/2011/main" val="0"/>
             </a:ext>
           </a:extLst>
         </p:spPr>
@@ -21989,7 +22124,7 @@
           </a:prstGeom>
           <a:extLst>
             <a:ext uri="{C572A759-6A51-4108-AA02-DFA0A04FC94B}">
-              <ma14:wrappingTextBoxFlag xmlns:ma14="http://schemas.microsoft.com/office/mac/drawingml/2011/main" xmlns="" val="0"/>
+              <ma14:wrappingTextBoxFlag xmlns="" xmlns:ma14="http://schemas.microsoft.com/office/mac/drawingml/2011/main" val="0"/>
             </a:ext>
           </a:extLst>
         </p:spPr>
@@ -22747,7 +22882,7 @@
           </a:prstGeom>
           <a:extLst>
             <a:ext uri="{C572A759-6A51-4108-AA02-DFA0A04FC94B}">
-              <ma14:wrappingTextBoxFlag xmlns:ma14="http://schemas.microsoft.com/office/mac/drawingml/2011/main" xmlns="" val="0"/>
+              <ma14:wrappingTextBoxFlag xmlns="" xmlns:ma14="http://schemas.microsoft.com/office/mac/drawingml/2011/main" val="0"/>
             </a:ext>
           </a:extLst>
         </p:spPr>

--- a/manufacturing_microservices.pptx
+++ b/manufacturing_microservices.pptx
@@ -117,35 +117,35 @@
   <p:extLst>
     <p:ext uri="{521415D9-36F7-43E2-AB2F-B90AF26B5E84}">
       <p14:sectionLst xmlns:p14="http://schemas.microsoft.com/office/powerpoint/2010/main">
-        <p14:section name="Introduction" id="{D8EEE2CF-D5E5-13D5-6835-18A44E487F64}">
+        <p14:section name="Introduction" id="{DDF649FA-F746-2AB5-9D36-048916CFCB82}">
           <p14:sldIdLst>
             <p14:sldId id="256"/>
           </p14:sldIdLst>
         </p14:section>
-        <p14:section name="Architecture" id="{EA919C07-924F-62D4-FC20-612EC880B5A1}">
+        <p14:section name="Architecture" id="{DC9F42F2-BF24-5A06-7017-66FAF418212E}">
           <p14:sldIdLst>
             <p14:sldId id="257"/>
           </p14:sldIdLst>
         </p14:section>
-        <p14:section name="Endpoints" id="{839092C4-917D-2DAF-4C0B-780D1AF3BFDA}">
+        <p14:section name="Endpoints" id="{DADB9E40-AFC5-9950-F556-CF3279B0FD4E}">
           <p14:sldIdLst>
             <p14:sldId id="258"/>
             <p14:sldId id="259"/>
           </p14:sldIdLst>
         </p14:section>
-        <p14:section name="Messaging and security" id="{D6BA9417-B36B-B083-E2A7-6A3377634169}">
+        <p14:section name="Messaging and security" id="{05410DE0-416F-2A07-A101-8AD45F11559B}">
           <p14:sldIdLst>
             <p14:sldId id="260"/>
             <p14:sldId id="261"/>
             <p14:sldId id="262"/>
           </p14:sldIdLst>
         </p14:section>
-        <p14:section name="Chassis" id="{E46BD858-255F-2B55-E2A9-12467A1E7EDF}">
+        <p14:section name="Chassis" id="{E5695403-FC8C-C88D-473A-403B96BDBE2C}">
           <p14:sldIdLst>
             <p14:sldId id="263"/>
           </p14:sldIdLst>
         </p14:section>
-        <p14:section name="Closing" id="{0185E7D7-5285-357D-B84E-78621729C77F}">
+        <p14:section name="Closing" id="{F0F51B4B-02D0-3B84-5B6C-32910AE5544A}">
           <p14:sldIdLst>
             <p14:sldId id="264"/>
             <p14:sldId id="265"/>
@@ -186,7 +186,7 @@
     </p:spTree>
     <p:extLst>
       <p:ext uri="{BB962C8B-B14F-4D97-AF65-F5344CB8AC3E}">
-        <p14:creationId xmlns:p14="http://schemas.microsoft.com/office/powerpoint/2010/main" val="591180990"/>
+        <p14:creationId xmlns:p14="http://schemas.microsoft.com/office/powerpoint/2010/main" val="3797512401"/>
       </p:ext>
     </p:extLst>
   </p:cSld>
@@ -314,13 +314,6 @@
           </p:nvPr>
         </p:nvSpPr>
         <p:spPr/>
-        <p:txBody>
-          <a:bodyPr/>
-          <a:lstStyle/>
-          <a:p>
-            <a:endParaRPr lang="es-ES"/>
-          </a:p>
-        </p:txBody>
       </p:sp>
       <p:sp>
         <p:nvSpPr>
@@ -408,13 +401,6 @@
           </p:nvPr>
         </p:nvSpPr>
         <p:spPr/>
-        <p:txBody>
-          <a:bodyPr/>
-          <a:lstStyle/>
-          <a:p>
-            <a:endParaRPr lang="es-ES"/>
-          </a:p>
-        </p:txBody>
       </p:sp>
       <p:sp>
         <p:nvSpPr>
@@ -433,7 +419,7 @@
           <a:p>
             <a:r>
               <a:rPr lang="en-US" dirty="0"/>
-              <a:t>Finally, what we would improve. Security: payments and deliveries currently run as root as a quick fix for volume permissions, so we'd fix the paths and go back to non-root, close the direct ports and move secrets out of the repository. Chassis: the 0.5.0 source should be pushed to its own repository with its tests, and released with tags. Messaging: a dead-letter queue, publishing snapshots only when they change instead of every five seconds, and cleaning old outbox rows. And operationally: remove legacy endpoints, recover test coverage and add CI. Thank you, questions are welcome.</a:t>
+              <a:t>Finally, what we would improve. Security: close the direct service ports, move secrets out of the repository and protect the remaining read routes. Chassis: publish tagged releases instead of only a vendored wheel, and share the consumer contracts as a package. Messaging: a dead-letter queue, publishing snapshots only when they change instead of every five seconds, and cleaning old outbox rows. And operationally: remove legacy endpoints, recover test coverage and add CI.</a:t>
             </a:r>
           </a:p>
         </p:txBody>
@@ -456,6 +442,93 @@
             <a:fld id="{F7021451-1387-4CA6-816F-3879F97B5CBC}" type="slidenum">
               <a:rPr lang="en-US"/>
               <a:t>10</a:t>
+            </a:fld>
+            <a:endParaRPr lang="en-US"/>
+          </a:p>
+        </p:txBody>
+      </p:sp>
+    </p:spTree>
+    <p:extLst>
+      <p:ext uri="{BB962C8B-B14F-4D97-AF65-F5344CB8AC3E}">
+        <p14:creationId xmlns:p14="http://schemas.microsoft.com/office/powerpoint/2010/main" val="1024086991"/>
+      </p:ext>
+    </p:extLst>
+  </p:cSld>
+  <p:clrMapOvr>
+    <a:masterClrMapping/>
+  </p:clrMapOvr>
+</p:notes>
+</file>
+
+<file path=ppt/notesSlides/notesSlide11.xml><?xml version="1.0" encoding="utf-8"?>
+<p:notes xmlns:a="http://schemas.openxmlformats.org/drawingml/2006/main" xmlns:r="http://schemas.openxmlformats.org/officeDocument/2006/relationships" xmlns:p="http://schemas.openxmlformats.org/presentationml/2006/main">
+  <p:cSld>
+    <p:spTree>
+      <p:nvGrpSpPr>
+        <p:cNvPr id="1" name=""/>
+        <p:cNvGrpSpPr/>
+        <p:nvPr/>
+      </p:nvGrpSpPr>
+      <p:grpSpPr>
+        <a:xfrm>
+          <a:off x="0" y="0"/>
+          <a:ext cx="0" cy="0"/>
+          <a:chOff x="0" y="0"/>
+          <a:chExt cx="0" cy="0"/>
+        </a:xfrm>
+      </p:grpSpPr>
+      <p:sp>
+        <p:nvSpPr>
+          <p:cNvPr id="2" name="Slide Image Placeholder 1"/>
+          <p:cNvSpPr>
+            <a:spLocks noGrp="1" noRot="1" noChangeAspect="1"/>
+          </p:cNvSpPr>
+          <p:nvPr>
+            <p:ph type="sldImg"/>
+          </p:nvPr>
+        </p:nvSpPr>
+        <p:spPr/>
+      </p:sp>
+      <p:sp>
+        <p:nvSpPr>
+          <p:cNvPr id="3" name="Notes Placeholder 2"/>
+          <p:cNvSpPr>
+            <a:spLocks noGrp="1"/>
+          </p:cNvSpPr>
+          <p:nvPr>
+            <p:ph type="body" idx="1"/>
+          </p:nvPr>
+        </p:nvSpPr>
+        <p:spPr/>
+        <p:txBody>
+          <a:bodyPr/>
+          <a:lstStyle/>
+          <a:p>
+            <a:r>
+              <a:rPr lang="en-US" dirty="0"/>
+              <a:t>Thank you. We're happy to take your questions.</a:t>
+            </a:r>
+          </a:p>
+        </p:txBody>
+      </p:sp>
+      <p:sp>
+        <p:nvSpPr>
+          <p:cNvPr id="4" name="Slide Number Placeholder 3"/>
+          <p:cNvSpPr>
+            <a:spLocks noGrp="1"/>
+          </p:cNvSpPr>
+          <p:nvPr>
+            <p:ph type="sldNum" sz="quarter" idx="10"/>
+          </p:nvPr>
+        </p:nvSpPr>
+        <p:spPr/>
+        <p:txBody>
+          <a:bodyPr/>
+          <a:lstStyle/>
+          <a:p>
+            <a:fld id="{F7021451-1387-4CA6-816F-3879F97B5CBC}" type="slidenum">
+              <a:rPr lang="en-US"/>
+              <a:t>11</a:t>
             </a:fld>
             <a:endParaRPr lang="en-US"/>
           </a:p>
@@ -502,13 +575,6 @@
           </p:nvPr>
         </p:nvSpPr>
         <p:spPr/>
-        <p:txBody>
-          <a:bodyPr/>
-          <a:lstStyle/>
-          <a:p>
-            <a:endParaRPr lang="es-ES"/>
-          </a:p>
-        </p:txBody>
       </p:sp>
       <p:sp>
         <p:nvSpPr>
@@ -596,13 +662,6 @@
           </p:nvPr>
         </p:nvSpPr>
         <p:spPr/>
-        <p:txBody>
-          <a:bodyPr/>
-          <a:lstStyle/>
-          <a:p>
-            <a:endParaRPr lang="es-ES"/>
-          </a:p>
-        </p:txBody>
       </p:sp>
       <p:sp>
         <p:nvSpPr>
@@ -690,13 +749,6 @@
           </p:nvPr>
         </p:nvSpPr>
         <p:spPr/>
-        <p:txBody>
-          <a:bodyPr/>
-          <a:lstStyle/>
-          <a:p>
-            <a:endParaRPr lang="es-ES"/>
-          </a:p>
-        </p:txBody>
       </p:sp>
       <p:sp>
         <p:nvSpPr>
@@ -784,13 +836,6 @@
           </p:nvPr>
         </p:nvSpPr>
         <p:spPr/>
-        <p:txBody>
-          <a:bodyPr/>
-          <a:lstStyle/>
-          <a:p>
-            <a:endParaRPr lang="es-ES"/>
-          </a:p>
-        </p:txBody>
       </p:sp>
       <p:sp>
         <p:nvSpPr>
@@ -878,13 +923,6 @@
           </p:nvPr>
         </p:nvSpPr>
         <p:spPr/>
-        <p:txBody>
-          <a:bodyPr/>
-          <a:lstStyle/>
-          <a:p>
-            <a:endParaRPr lang="es-ES"/>
-          </a:p>
-        </p:txBody>
       </p:sp>
       <p:sp>
         <p:nvSpPr>
@@ -972,13 +1010,6 @@
           </p:nvPr>
         </p:nvSpPr>
         <p:spPr/>
-        <p:txBody>
-          <a:bodyPr/>
-          <a:lstStyle/>
-          <a:p>
-            <a:endParaRPr lang="es-ES"/>
-          </a:p>
-        </p:txBody>
       </p:sp>
       <p:sp>
         <p:nvSpPr>
@@ -1066,13 +1097,6 @@
           </p:nvPr>
         </p:nvSpPr>
         <p:spPr/>
-        <p:txBody>
-          <a:bodyPr/>
-          <a:lstStyle/>
-          <a:p>
-            <a:endParaRPr lang="es-ES"/>
-          </a:p>
-        </p:txBody>
       </p:sp>
       <p:sp>
         <p:nvSpPr>
@@ -1160,13 +1184,6 @@
           </p:nvPr>
         </p:nvSpPr>
         <p:spPr/>
-        <p:txBody>
-          <a:bodyPr/>
-          <a:lstStyle/>
-          <a:p>
-            <a:endParaRPr lang="es-ES"/>
-          </a:p>
-        </p:txBody>
       </p:sp>
       <p:sp>
         <p:nvSpPr>
@@ -1258,11 +1275,11 @@
 
 <file path=ppt/slideLayouts/slideLayout2.xml><?xml version="1.0" encoding="utf-8"?>
 <p:sldLayout xmlns:a="http://schemas.openxmlformats.org/drawingml/2006/main" xmlns:r="http://schemas.openxmlformats.org/officeDocument/2006/relationships" xmlns:p="http://schemas.openxmlformats.org/presentationml/2006/main" preserve="1">
-  <p:cSld name="TITLE_DARK">
+  <p:cSld name="MU_TITLE">
     <p:bg>
       <p:bgPr>
         <a:solidFill>
-          <a:schemeClr val="tx1"/>
+          <a:schemeClr val="bg1"/>
         </a:solidFill>
         <a:effectLst/>
       </p:bgPr>
@@ -1283,18 +1300,74 @@
       </p:grpSpPr>
       <p:sp>
         <p:nvSpPr>
-          <p:cNvPr id="2" name="Text 0"/>
+          <p:cNvPr id="2" name="Shape 0"/>
+          <p:cNvSpPr/>
+          <p:nvPr/>
+        </p:nvSpPr>
+        <p:spPr>
+          <a:xfrm>
+            <a:off x="0" y="0"/>
+            <a:ext cx="12191695" cy="5577840"/>
+          </a:xfrm>
+          <a:prstGeom prst="rect">
+            <a:avLst/>
+          </a:prstGeom>
+          <a:solidFill>
+            <a:schemeClr val="accent1"/>
+          </a:solidFill>
+          <a:ln w="12700">
+            <a:solidFill>
+              <a:schemeClr val="accent1"/>
+            </a:solidFill>
+            <a:prstDash val="solid"/>
+          </a:ln>
+        </p:spPr>
+        <p:txBody>
+          <a:bodyPr/>
+          <a:lstStyle/>
+          <a:p>
+            <a:endParaRPr lang="es-ES"/>
+          </a:p>
+        </p:txBody>
+      </p:sp>
+      <p:pic>
+        <p:nvPicPr>
+          <p:cNvPr id="3" name="Image 0" descr="/home/claude/mu/logo_full.png"/>
+          <p:cNvPicPr>
+            <a:picLocks noChangeAspect="1"/>
+          </p:cNvPicPr>
+          <p:nvPr/>
+        </p:nvPicPr>
+        <p:blipFill>
+          <a:blip r:embed="rId2"/>
+          <a:stretch>
+            <a:fillRect/>
+          </a:stretch>
+        </p:blipFill>
+        <p:spPr>
+          <a:xfrm>
+            <a:off x="5715000" y="5687568"/>
+            <a:ext cx="758952" cy="1078992"/>
+          </a:xfrm>
+          <a:prstGeom prst="rect">
+            <a:avLst/>
+          </a:prstGeom>
+        </p:spPr>
+      </p:pic>
+      <p:sp>
+        <p:nvSpPr>
+          <p:cNvPr id="4" name="Text 1"/>
           <p:cNvSpPr>
             <a:spLocks noGrp="1"/>
           </p:cNvSpPr>
           <p:nvPr>
-            <p:ph type="title" idx="100" hasCustomPrompt="1"/>
+            <p:ph type="title" idx="102" hasCustomPrompt="1"/>
           </p:nvPr>
         </p:nvSpPr>
         <p:spPr>
           <a:xfrm>
-            <a:off x="731520" y="1828800"/>
-            <a:ext cx="10698480" cy="1371600"/>
+            <a:off x="731520" y="1417320"/>
+            <a:ext cx="10698480" cy="1463040"/>
           </a:xfrm>
           <a:prstGeom prst="rect">
             <a:avLst/>
@@ -1305,9 +1378,9 @@
         <p:txBody>
           <a:bodyPr wrap="square" rtlCol="0"/>
           <a:lstStyle>
-            <a:lvl1pPr marL="0" indent="0" algn="l">
+            <a:lvl1pPr marL="0" indent="0" algn="ctr">
               <a:buNone/>
-              <a:defRPr lang="en-US" sz="4400" b="1" dirty="0">
+              <a:defRPr lang="en-US" sz="4800" b="1" dirty="0">
                 <a:solidFill>
                   <a:schemeClr val="bg1"/>
                 </a:solidFill>
@@ -1315,26 +1388,26 @@
             </a:lvl1pPr>
           </a:lstStyle>
           <a:p>
-            <a:pPr marL="0" indent="0" algn="l">
+            <a:pPr marL="0" indent="0" algn="ctr">
               <a:buNone/>
             </a:pPr>
-            <a:endParaRPr lang="en-US" sz="4400" dirty="0"/>
+            <a:endParaRPr lang="en-US" sz="4800" dirty="0"/>
           </a:p>
         </p:txBody>
       </p:sp>
       <p:sp>
         <p:nvSpPr>
-          <p:cNvPr id="3" name="Text 0"/>
+          <p:cNvPr id="5" name="Text 1"/>
           <p:cNvSpPr>
             <a:spLocks noGrp="1"/>
           </p:cNvSpPr>
           <p:nvPr>
-            <p:ph type="body" idx="101" hasCustomPrompt="1"/>
+            <p:ph type="body" idx="103" hasCustomPrompt="1"/>
           </p:nvPr>
         </p:nvSpPr>
         <p:spPr>
           <a:xfrm>
-            <a:off x="731520" y="3291840"/>
+            <a:off x="731520" y="2926080"/>
             <a:ext cx="10698480" cy="914400"/>
           </a:xfrm>
           <a:prstGeom prst="rect">
@@ -1346,20 +1419,20 @@
         <p:txBody>
           <a:bodyPr wrap="square" rtlCol="0"/>
           <a:lstStyle>
-            <a:lvl1pPr marL="0" indent="0">
+            <a:lvl1pPr marL="0" indent="0" algn="ctr">
               <a:buNone/>
-              <a:defRPr lang="en-US" sz="2000" dirty="0">
+              <a:defRPr lang="en-US" sz="2200" b="1" dirty="0">
                 <a:solidFill>
-                  <a:schemeClr val="accent4"/>
+                  <a:schemeClr val="bg1"/>
                 </a:solidFill>
               </a:defRPr>
             </a:lvl1pPr>
           </a:lstStyle>
           <a:p>
-            <a:pPr marL="0" indent="0">
+            <a:pPr marL="0" indent="0" algn="ctr">
               <a:buNone/>
             </a:pPr>
-            <a:endParaRPr lang="en-US" sz="2000" dirty="0"/>
+            <a:endParaRPr lang="en-US" sz="2200" dirty="0"/>
           </a:p>
         </p:txBody>
       </p:sp>
@@ -1398,173 +1471,43 @@
       </p:grpSpPr>
       <p:sp>
         <p:nvSpPr>
-          <p:cNvPr id="2" name="Text 0"/>
-          <p:cNvSpPr>
-            <a:spLocks noGrp="1"/>
-          </p:cNvSpPr>
-          <p:nvPr>
-            <p:ph type="title" idx="100" hasCustomPrompt="1"/>
-          </p:nvPr>
-        </p:nvSpPr>
-        <p:spPr>
-          <a:xfrm>
-            <a:off x="548640" y="320040"/>
-            <a:ext cx="11064240" cy="822960"/>
-          </a:xfrm>
-          <a:prstGeom prst="rect">
-            <a:avLst/>
-          </a:prstGeom>
-          <a:noFill/>
-          <a:ln/>
-        </p:spPr>
-        <p:txBody>
-          <a:bodyPr wrap="square" rtlCol="0"/>
-          <a:lstStyle>
-            <a:lvl1pPr marL="0" indent="0" algn="l">
-              <a:buNone/>
-              <a:defRPr lang="en-US" sz="3000" b="1" dirty="0">
-                <a:solidFill>
-                  <a:schemeClr val="tx1"/>
-                </a:solidFill>
-              </a:defRPr>
-            </a:lvl1pPr>
-          </a:lstStyle>
-          <a:p>
-            <a:pPr marL="0" indent="0" algn="l">
-              <a:buNone/>
-            </a:pPr>
-            <a:endParaRPr lang="en-US" sz="3000" dirty="0"/>
-          </a:p>
-        </p:txBody>
-      </p:sp>
-      <p:sp>
-        <p:nvSpPr>
-          <p:cNvPr id="3" name="Text 0"/>
+          <p:cNvPr id="2" name="Shape 0"/>
           <p:cNvSpPr/>
           <p:nvPr/>
         </p:nvSpPr>
         <p:spPr>
           <a:xfrm>
-            <a:off x="548640" y="6400800"/>
-            <a:ext cx="5486400" cy="274320"/>
+            <a:off x="0" y="0"/>
+            <a:ext cx="12191695" cy="777240"/>
           </a:xfrm>
           <a:prstGeom prst="rect">
             <a:avLst/>
           </a:prstGeom>
-          <a:noFill/>
-          <a:ln/>
+          <a:solidFill>
+            <a:schemeClr val="accent1"/>
+          </a:solidFill>
+          <a:ln w="12700">
+            <a:solidFill>
+              <a:schemeClr val="accent1"/>
+            </a:solidFill>
+            <a:prstDash val="solid"/>
+          </a:ln>
         </p:spPr>
-        <p:txBody>
-          <a:bodyPr wrap="square" rtlCol="0" anchor="ctr"/>
-          <a:lstStyle/>
-          <a:p>
-            <a:pPr marL="0" indent="0">
-              <a:buNone/>
-            </a:pPr>
-            <a:r>
-              <a:rPr lang="en-US" sz="1000" dirty="0">
-                <a:solidFill>
-                  <a:schemeClr val="accent4"/>
-                </a:solidFill>
-              </a:rPr>
-              <a:t>Manufacturing microservices</a:t>
-            </a:r>
-            <a:endParaRPr lang="en-US" sz="1000" dirty="0"/>
-          </a:p>
-        </p:txBody>
       </p:sp>
       <p:sp>
         <p:nvSpPr>
-          <p:cNvPr id="25" name="Slide Number Placeholder 0"/>
+          <p:cNvPr id="3" name="Text 1"/>
           <p:cNvSpPr>
             <a:spLocks noGrp="1"/>
           </p:cNvSpPr>
           <p:nvPr>
-            <p:ph type="sldNum" sz="quarter" idx="4294967295"/>
+            <p:ph type="title" idx="101" hasCustomPrompt="1"/>
           </p:nvPr>
         </p:nvSpPr>
         <p:spPr>
           <a:xfrm>
-            <a:off x="11155680" y="6400800"/>
-            <a:ext cx="457200" cy="274320"/>
-          </a:xfrm>
-          <a:prstGeom prst="rect">
-            <a:avLst/>
-          </a:prstGeom>
-          <a:extLst>
-            <a:ext uri="{C572A759-6A51-4108-AA02-DFA0A04FC94B}">
-              <ma14:wrappingTextBoxFlag xmlns="" xmlns:ma14="http://schemas.microsoft.com/office/mac/drawingml/2011/main" val="0"/>
-            </a:ext>
-          </a:extLst>
-        </p:spPr>
-        <p:txBody>
-          <a:bodyPr/>
-          <a:lstStyle>
-            <a:lvl1pPr>
-              <a:defRPr sz="1000">
-                <a:solidFill>
-                  <a:schemeClr val="accent4"/>
-                </a:solidFill>
-              </a:defRPr>
-            </a:lvl1pPr>
-          </a:lstStyle>
-          <a:p>
-            <a:pPr algn="r"/>
-            <a:fld id="{F7021451-1387-4CA6-816F-3879F97B5CBC}" type="slidenum">
-              <a:rPr lang="en-US" b="0"/>
-              <a:t>‹Nº›</a:t>
-            </a:fld>
-            <a:endParaRPr lang="en-US"/>
-          </a:p>
-        </p:txBody>
-      </p:sp>
-    </p:spTree>
-  </p:cSld>
-  <p:clrMapOvr>
-    <a:masterClrMapping/>
-  </p:clrMapOvr>
-</p:sldLayout>
-</file>
-
-<file path=ppt/slideLayouts/slideLayout4.xml><?xml version="1.0" encoding="utf-8"?>
-<p:sldLayout xmlns:a="http://schemas.openxmlformats.org/drawingml/2006/main" xmlns:r="http://schemas.openxmlformats.org/officeDocument/2006/relationships" xmlns:p="http://schemas.openxmlformats.org/presentationml/2006/main" preserve="1">
-  <p:cSld name="CLOSING_DARK">
-    <p:bg>
-      <p:bgPr>
-        <a:solidFill>
-          <a:schemeClr val="tx1"/>
-        </a:solidFill>
-        <a:effectLst/>
-      </p:bgPr>
-    </p:bg>
-    <p:spTree>
-      <p:nvGrpSpPr>
-        <p:cNvPr id="1" name=""/>
-        <p:cNvGrpSpPr/>
-        <p:nvPr/>
-      </p:nvGrpSpPr>
-      <p:grpSpPr>
-        <a:xfrm>
-          <a:off x="0" y="0"/>
-          <a:ext cx="0" cy="0"/>
-          <a:chOff x="0" y="0"/>
-          <a:chExt cx="0" cy="0"/>
-        </a:xfrm>
-      </p:grpSpPr>
-      <p:sp>
-        <p:nvSpPr>
-          <p:cNvPr id="2" name="Text 0"/>
-          <p:cNvSpPr>
-            <a:spLocks noGrp="1"/>
-          </p:cNvSpPr>
-          <p:nvPr>
-            <p:ph type="title" idx="100" hasCustomPrompt="1"/>
-          </p:nvPr>
-        </p:nvSpPr>
-        <p:spPr>
-          <a:xfrm>
-            <a:off x="548640" y="457200"/>
-            <a:ext cx="11064240" cy="822960"/>
+            <a:off x="228600" y="0"/>
+            <a:ext cx="11704320" cy="777240"/>
           </a:xfrm>
           <a:prstGeom prst="rect">
             <a:avLst/>
@@ -1589,6 +1532,161 @@
               <a:buNone/>
             </a:pPr>
             <a:endParaRPr lang="en-US" sz="3000" dirty="0"/>
+          </a:p>
+        </p:txBody>
+      </p:sp>
+      <p:pic>
+        <p:nvPicPr>
+          <p:cNvPr id="4" name="Image 0" descr="/home/claude/mu/logo_small.png"/>
+          <p:cNvPicPr>
+            <a:picLocks noChangeAspect="1"/>
+          </p:cNvPicPr>
+          <p:nvPr/>
+        </p:nvPicPr>
+        <p:blipFill>
+          <a:blip r:embed="rId2"/>
+          <a:stretch>
+            <a:fillRect/>
+          </a:stretch>
+        </p:blipFill>
+        <p:spPr>
+          <a:xfrm>
+            <a:off x="109728" y="6492240"/>
+            <a:ext cx="393192" cy="310896"/>
+          </a:xfrm>
+          <a:prstGeom prst="rect">
+            <a:avLst/>
+          </a:prstGeom>
+        </p:spPr>
+      </p:pic>
+      <p:sp>
+        <p:nvSpPr>
+          <p:cNvPr id="5" name="Shape 1"/>
+          <p:cNvSpPr/>
+          <p:nvPr/>
+        </p:nvSpPr>
+        <p:spPr>
+          <a:xfrm>
+            <a:off x="594360" y="6510528"/>
+            <a:ext cx="10744200" cy="274320"/>
+          </a:xfrm>
+          <a:prstGeom prst="rect">
+            <a:avLst/>
+          </a:prstGeom>
+          <a:solidFill>
+            <a:srgbClr val="CCCCCC"/>
+          </a:solidFill>
+          <a:ln w="12700">
+            <a:solidFill>
+              <a:srgbClr val="CCCCCC"/>
+            </a:solidFill>
+            <a:prstDash val="solid"/>
+          </a:ln>
+        </p:spPr>
+      </p:sp>
+      <p:sp>
+        <p:nvSpPr>
+          <p:cNvPr id="6" name="Text 2"/>
+          <p:cNvSpPr/>
+          <p:nvPr/>
+        </p:nvSpPr>
+        <p:spPr>
+          <a:xfrm>
+            <a:off x="594360" y="6510528"/>
+            <a:ext cx="10744200" cy="274320"/>
+          </a:xfrm>
+          <a:prstGeom prst="rect">
+            <a:avLst/>
+          </a:prstGeom>
+          <a:noFill/>
+          <a:ln/>
+        </p:spPr>
+        <p:txBody>
+          <a:bodyPr wrap="square" rtlCol="0" anchor="ctr"/>
+          <a:lstStyle/>
+          <a:p>
+            <a:pPr marL="0" indent="0" algn="ctr">
+              <a:buNone/>
+            </a:pPr>
+            <a:r>
+              <a:rPr lang="en-US" sz="1300" b="1" dirty="0">
+                <a:solidFill>
+                  <a:srgbClr val="000000"/>
+                </a:solidFill>
+              </a:rPr>
+              <a:t>Mondragon Unibertsitatea</a:t>
+            </a:r>
+            <a:endParaRPr lang="en-US" sz="1300" dirty="0"/>
+          </a:p>
+        </p:txBody>
+      </p:sp>
+      <p:sp>
+        <p:nvSpPr>
+          <p:cNvPr id="7" name="Shape 3"/>
+          <p:cNvSpPr/>
+          <p:nvPr/>
+        </p:nvSpPr>
+        <p:spPr>
+          <a:xfrm>
+            <a:off x="11430000" y="6510528"/>
+            <a:ext cx="502920" cy="274320"/>
+          </a:xfrm>
+          <a:prstGeom prst="rect">
+            <a:avLst/>
+          </a:prstGeom>
+          <a:solidFill>
+            <a:schemeClr val="accent1"/>
+          </a:solidFill>
+          <a:ln w="12700">
+            <a:solidFill>
+              <a:schemeClr val="accent1"/>
+            </a:solidFill>
+            <a:prstDash val="solid"/>
+          </a:ln>
+        </p:spPr>
+      </p:sp>
+      <p:sp>
+        <p:nvSpPr>
+          <p:cNvPr id="25" name="Slide Number Placeholder 0"/>
+          <p:cNvSpPr>
+            <a:spLocks noGrp="1"/>
+          </p:cNvSpPr>
+          <p:nvPr>
+            <p:ph type="sldNum" sz="quarter" idx="4294967295"/>
+          </p:nvPr>
+        </p:nvSpPr>
+        <p:spPr>
+          <a:xfrm>
+            <a:off x="11430000" y="6510528"/>
+            <a:ext cx="502920" cy="274320"/>
+          </a:xfrm>
+          <a:prstGeom prst="rect">
+            <a:avLst/>
+          </a:prstGeom>
+          <a:extLst>
+            <a:ext uri="{C572A759-6A51-4108-AA02-DFA0A04FC94B}">
+              <ma14:wrappingTextBoxFlag xmlns:ma14="http://schemas.microsoft.com/office/mac/drawingml/2011/main" xmlns="" val="0"/>
+            </a:ext>
+          </a:extLst>
+        </p:spPr>
+        <p:txBody>
+          <a:bodyPr anchor="ctr"/>
+          <a:lstStyle>
+            <a:lvl1pPr>
+              <a:defRPr sz="1100">
+                <a:solidFill>
+                  <a:schemeClr val="bg1"/>
+                </a:solidFill>
+              </a:defRPr>
+            </a:lvl1pPr>
+          </a:lstStyle>
+          <a:p>
+            <a:pPr algn="ctr"/>
+            <a:fld id="{F7021451-1387-4CA6-816F-3879F97B5CBC}" type="slidenum">
+              <a:rPr lang="en-US" b="0"/>
+              <a:t>‹Nº›</a:t>
+            </a:fld>
+            <a:endParaRPr lang="en-US"/>
           </a:p>
         </p:txBody>
       </p:sp>
@@ -1634,31 +1732,31 @@
         </p:nvSpPr>
         <p:spPr>
           <a:xfrm>
-            <a:off x="11155680" y="6400800"/>
-            <a:ext cx="457200" cy="274320"/>
+            <a:off x="11430000" y="6510528"/>
+            <a:ext cx="502920" cy="274320"/>
           </a:xfrm>
           <a:prstGeom prst="rect">
             <a:avLst/>
           </a:prstGeom>
           <a:extLst>
             <a:ext uri="{C572A759-6A51-4108-AA02-DFA0A04FC94B}">
-              <ma14:wrappingTextBoxFlag xmlns="" xmlns:ma14="http://schemas.microsoft.com/office/mac/drawingml/2011/main" val="0"/>
+              <ma14:wrappingTextBoxFlag xmlns:ma14="http://schemas.microsoft.com/office/mac/drawingml/2011/main" xmlns="" val="0"/>
             </a:ext>
           </a:extLst>
         </p:spPr>
         <p:txBody>
-          <a:bodyPr/>
+          <a:bodyPr anchor="ctr"/>
           <a:lstStyle>
             <a:lvl1pPr>
-              <a:defRPr sz="1000">
+              <a:defRPr sz="1100">
                 <a:solidFill>
-                  <a:schemeClr val="accent4"/>
+                  <a:schemeClr val="bg1"/>
                 </a:solidFill>
               </a:defRPr>
             </a:lvl1pPr>
           </a:lstStyle>
           <a:p>
-            <a:pPr algn="r"/>
+            <a:pPr algn="ctr"/>
             <a:fld id="{F7021451-1387-4CA6-816F-3879F97B5CBC}" type="slidenum">
               <a:rPr lang="en-US" b="0"/>
               <a:t>‹Nº›</a:t>
@@ -1674,7 +1772,6 @@
     <p:sldLayoutId id="2147483649" r:id="rId1"/>
     <p:sldLayoutId id="2147483650" r:id="rId2"/>
     <p:sldLayoutId id="2147483651" r:id="rId3"/>
-    <p:sldLayoutId id="2147483652" r:id="rId4"/>
   </p:sldLayoutIdLst>
   <p:hf sldNum="0" hdr="0" ftr="0" dt="0"/>
   <p:txStyles>
@@ -1949,18 +2046,18 @@
       </p:grpSpPr>
       <p:sp>
         <p:nvSpPr>
-          <p:cNvPr id="2" name="Text 0"/>
+          <p:cNvPr id="2" name="Text 1"/>
           <p:cNvSpPr>
             <a:spLocks noGrp="1"/>
           </p:cNvSpPr>
           <p:nvPr>
-            <p:ph type="title" idx="100" hasCustomPrompt="1"/>
+            <p:ph type="title" idx="102" hasCustomPrompt="1"/>
           </p:nvPr>
         </p:nvSpPr>
         <p:spPr>
           <a:xfrm>
-            <a:off x="731520" y="1828800"/>
-            <a:ext cx="10698480" cy="1371600"/>
+            <a:off x="731520" y="1417320"/>
+            <a:ext cx="10698480" cy="1463040"/>
           </a:xfrm>
           <a:prstGeom prst="rect">
             <a:avLst/>
@@ -1972,34 +2069,34 @@
           <a:bodyPr wrap="square" rtlCol="0" anchor="b"/>
           <a:lstStyle/>
           <a:p>
-            <a:pPr marL="0" indent="0" algn="l">
+            <a:pPr marL="0" indent="0" algn="ctr">
               <a:buNone/>
             </a:pPr>
             <a:r>
-              <a:rPr lang="en-US" sz="4400" b="1" dirty="0">
+              <a:rPr lang="en-US" sz="4800" b="1" dirty="0">
                 <a:solidFill>
                   <a:schemeClr val="bg1"/>
                 </a:solidFill>
               </a:rPr>
               <a:t>From Monolith to Microservices</a:t>
             </a:r>
-            <a:endParaRPr lang="en-US" sz="4400" dirty="0"/>
+            <a:endParaRPr lang="en-US" sz="4800" dirty="0"/>
           </a:p>
         </p:txBody>
       </p:sp>
       <p:sp>
         <p:nvSpPr>
-          <p:cNvPr id="3" name="Text 0"/>
+          <p:cNvPr id="3" name="Text 1"/>
           <p:cNvSpPr>
             <a:spLocks noGrp="1"/>
           </p:cNvSpPr>
           <p:nvPr>
-            <p:ph type="body" idx="101" hasCustomPrompt="1"/>
+            <p:ph type="body" idx="103" hasCustomPrompt="1"/>
           </p:nvPr>
         </p:nvSpPr>
         <p:spPr>
           <a:xfrm>
-            <a:off x="731520" y="3291840"/>
+            <a:off x="731520" y="2926080"/>
             <a:ext cx="10698480" cy="914400"/>
           </a:xfrm>
           <a:prstGeom prst="rect">
@@ -2012,478 +2109,18 @@
           <a:bodyPr wrap="square" rtlCol="0" anchor="t"/>
           <a:lstStyle/>
           <a:p>
-            <a:pPr marL="0" indent="0">
-              <a:buNone/>
-            </a:pPr>
-            <a:r>
-              <a:rPr lang="en-US" sz="2000" dirty="0">
-                <a:solidFill>
-                  <a:schemeClr val="accent4"/>
-                </a:solidFill>
-              </a:rPr>
-              <a:t>Manufacturing system · event choreography, security and a shared chassis</a:t>
-            </a:r>
-            <a:endParaRPr lang="en-US" sz="2000" dirty="0"/>
-          </a:p>
-        </p:txBody>
-      </p:sp>
-      <p:sp>
-        <p:nvSpPr>
-          <p:cNvPr id="4" name="Clients circle"/>
-          <p:cNvSpPr/>
-          <p:nvPr/>
-        </p:nvSpPr>
-        <p:spPr>
-          <a:xfrm>
-            <a:off x="731520" y="4846320"/>
-            <a:ext cx="731520" cy="731520"/>
-          </a:xfrm>
-          <a:prstGeom prst="ellipse">
-            <a:avLst/>
-          </a:prstGeom>
-          <a:solidFill>
-            <a:schemeClr val="tx2"/>
-          </a:solidFill>
-          <a:ln w="12700">
-            <a:solidFill>
-              <a:schemeClr val="tx2"/>
-            </a:solidFill>
-            <a:prstDash val="solid"/>
-          </a:ln>
-        </p:spPr>
-        <p:txBody>
-          <a:bodyPr/>
-          <a:lstStyle/>
-          <a:p>
-            <a:endParaRPr lang="es-ES"/>
-          </a:p>
-        </p:txBody>
-      </p:sp>
-      <p:pic>
-        <p:nvPicPr>
-          <p:cNvPr id="5" name="Clients icon" descr="preencoded.png"/>
-          <p:cNvPicPr>
-            <a:picLocks noChangeAspect="1"/>
-          </p:cNvPicPr>
-          <p:nvPr/>
-        </p:nvPicPr>
-        <p:blipFill>
-          <a:blip r:embed="rId3"/>
-          <a:stretch>
-            <a:fillRect/>
-          </a:stretch>
-        </p:blipFill>
-        <p:spPr>
-          <a:xfrm>
-            <a:off x="914400" y="5029200"/>
-            <a:ext cx="365760" cy="365760"/>
-          </a:xfrm>
-          <a:prstGeom prst="rect">
-            <a:avLst/>
-          </a:prstGeom>
-        </p:spPr>
-      </p:pic>
-      <p:sp>
-        <p:nvSpPr>
-          <p:cNvPr id="6" name="Clients label"/>
-          <p:cNvSpPr txBox="1"/>
-          <p:nvPr/>
-        </p:nvSpPr>
-        <p:spPr>
-          <a:xfrm>
-            <a:off x="457200" y="5623560"/>
-            <a:ext cx="1280160" cy="320040"/>
-          </a:xfrm>
-          <a:prstGeom prst="rect">
-            <a:avLst/>
-          </a:prstGeom>
-          <a:noFill/>
-          <a:ln/>
-        </p:spPr>
-        <p:txBody>
-          <a:bodyPr wrap="square" rtlCol="0" anchor="ctr"/>
-          <a:lstStyle/>
-          <a:p>
             <a:pPr marL="0" indent="0" algn="ctr">
               <a:buNone/>
             </a:pPr>
             <a:r>
-              <a:rPr lang="en-US" sz="1200" dirty="0">
+              <a:rPr lang="en-US" sz="2200" b="1" dirty="0">
                 <a:solidFill>
-                  <a:schemeClr val="accent4"/>
+                  <a:schemeClr val="bg1"/>
                 </a:solidFill>
               </a:rPr>
-              <a:t>Clients</a:t>
+              <a:t>Alejandro Pelegrin, Unai del Rio, Unax Picó, Xiang Chen, Javier Criado</a:t>
             </a:r>
-            <a:endParaRPr lang="en-US" sz="1200" dirty="0"/>
-          </a:p>
-        </p:txBody>
-      </p:sp>
-      <p:sp>
-        <p:nvSpPr>
-          <p:cNvPr id="7" name="Orders circle"/>
-          <p:cNvSpPr/>
-          <p:nvPr/>
-        </p:nvSpPr>
-        <p:spPr>
-          <a:xfrm>
-            <a:off x="2103120" y="4846320"/>
-            <a:ext cx="731520" cy="731520"/>
-          </a:xfrm>
-          <a:prstGeom prst="ellipse">
-            <a:avLst/>
-          </a:prstGeom>
-          <a:solidFill>
-            <a:schemeClr val="accent1"/>
-          </a:solidFill>
-          <a:ln w="12700">
-            <a:solidFill>
-              <a:schemeClr val="accent1"/>
-            </a:solidFill>
-            <a:prstDash val="solid"/>
-          </a:ln>
-        </p:spPr>
-        <p:txBody>
-          <a:bodyPr/>
-          <a:lstStyle/>
-          <a:p>
-            <a:endParaRPr lang="es-ES"/>
-          </a:p>
-        </p:txBody>
-      </p:sp>
-      <p:pic>
-        <p:nvPicPr>
-          <p:cNvPr id="8" name="Orders icon" descr="preencoded.png"/>
-          <p:cNvPicPr>
-            <a:picLocks noChangeAspect="1"/>
-          </p:cNvPicPr>
-          <p:nvPr/>
-        </p:nvPicPr>
-        <p:blipFill>
-          <a:blip r:embed="rId4"/>
-          <a:stretch>
-            <a:fillRect/>
-          </a:stretch>
-        </p:blipFill>
-        <p:spPr>
-          <a:xfrm>
-            <a:off x="2286000" y="5029200"/>
-            <a:ext cx="365760" cy="365760"/>
-          </a:xfrm>
-          <a:prstGeom prst="rect">
-            <a:avLst/>
-          </a:prstGeom>
-        </p:spPr>
-      </p:pic>
-      <p:sp>
-        <p:nvSpPr>
-          <p:cNvPr id="9" name="Orders label"/>
-          <p:cNvSpPr txBox="1"/>
-          <p:nvPr/>
-        </p:nvSpPr>
-        <p:spPr>
-          <a:xfrm>
-            <a:off x="1828800" y="5623560"/>
-            <a:ext cx="1280160" cy="320040"/>
-          </a:xfrm>
-          <a:prstGeom prst="rect">
-            <a:avLst/>
-          </a:prstGeom>
-          <a:noFill/>
-          <a:ln/>
-        </p:spPr>
-        <p:txBody>
-          <a:bodyPr wrap="square" rtlCol="0" anchor="ctr"/>
-          <a:lstStyle/>
-          <a:p>
-            <a:pPr marL="0" indent="0" algn="ctr">
-              <a:buNone/>
-            </a:pPr>
-            <a:r>
-              <a:rPr lang="en-US" sz="1200" dirty="0">
-                <a:solidFill>
-                  <a:schemeClr val="accent4"/>
-                </a:solidFill>
-              </a:rPr>
-              <a:t>Orders</a:t>
-            </a:r>
-            <a:endParaRPr lang="en-US" sz="1200" dirty="0"/>
-          </a:p>
-        </p:txBody>
-      </p:sp>
-      <p:sp>
-        <p:nvSpPr>
-          <p:cNvPr id="10" name="Payments circle"/>
-          <p:cNvSpPr/>
-          <p:nvPr/>
-        </p:nvSpPr>
-        <p:spPr>
-          <a:xfrm>
-            <a:off x="3474720" y="4846320"/>
-            <a:ext cx="731520" cy="731520"/>
-          </a:xfrm>
-          <a:prstGeom prst="ellipse">
-            <a:avLst/>
-          </a:prstGeom>
-          <a:solidFill>
-            <a:schemeClr val="tx2"/>
-          </a:solidFill>
-          <a:ln w="12700">
-            <a:solidFill>
-              <a:schemeClr val="tx2"/>
-            </a:solidFill>
-            <a:prstDash val="solid"/>
-          </a:ln>
-        </p:spPr>
-        <p:txBody>
-          <a:bodyPr/>
-          <a:lstStyle/>
-          <a:p>
-            <a:endParaRPr lang="es-ES"/>
-          </a:p>
-        </p:txBody>
-      </p:sp>
-      <p:pic>
-        <p:nvPicPr>
-          <p:cNvPr id="11" name="Payments icon" descr="preencoded.png"/>
-          <p:cNvPicPr>
-            <a:picLocks noChangeAspect="1"/>
-          </p:cNvPicPr>
-          <p:nvPr/>
-        </p:nvPicPr>
-        <p:blipFill>
-          <a:blip r:embed="rId5"/>
-          <a:stretch>
-            <a:fillRect/>
-          </a:stretch>
-        </p:blipFill>
-        <p:spPr>
-          <a:xfrm>
-            <a:off x="3657600" y="5029200"/>
-            <a:ext cx="365760" cy="365760"/>
-          </a:xfrm>
-          <a:prstGeom prst="rect">
-            <a:avLst/>
-          </a:prstGeom>
-        </p:spPr>
-      </p:pic>
-      <p:sp>
-        <p:nvSpPr>
-          <p:cNvPr id="12" name="Payments label"/>
-          <p:cNvSpPr txBox="1"/>
-          <p:nvPr/>
-        </p:nvSpPr>
-        <p:spPr>
-          <a:xfrm>
-            <a:off x="3200400" y="5623560"/>
-            <a:ext cx="1280160" cy="320040"/>
-          </a:xfrm>
-          <a:prstGeom prst="rect">
-            <a:avLst/>
-          </a:prstGeom>
-          <a:noFill/>
-          <a:ln/>
-        </p:spPr>
-        <p:txBody>
-          <a:bodyPr wrap="square" rtlCol="0" anchor="ctr"/>
-          <a:lstStyle/>
-          <a:p>
-            <a:pPr marL="0" indent="0" algn="ctr">
-              <a:buNone/>
-            </a:pPr>
-            <a:r>
-              <a:rPr lang="en-US" sz="1200" dirty="0">
-                <a:solidFill>
-                  <a:schemeClr val="accent4"/>
-                </a:solidFill>
-              </a:rPr>
-              <a:t>Payments</a:t>
-            </a:r>
-            <a:endParaRPr lang="en-US" sz="1200" dirty="0"/>
-          </a:p>
-        </p:txBody>
-      </p:sp>
-      <p:sp>
-        <p:nvSpPr>
-          <p:cNvPr id="13" name="Machine circle"/>
-          <p:cNvSpPr/>
-          <p:nvPr/>
-        </p:nvSpPr>
-        <p:spPr>
-          <a:xfrm>
-            <a:off x="4846320" y="4846320"/>
-            <a:ext cx="731520" cy="731520"/>
-          </a:xfrm>
-          <a:prstGeom prst="ellipse">
-            <a:avLst/>
-          </a:prstGeom>
-          <a:solidFill>
-            <a:schemeClr val="tx2"/>
-          </a:solidFill>
-          <a:ln w="12700">
-            <a:solidFill>
-              <a:schemeClr val="tx2"/>
-            </a:solidFill>
-            <a:prstDash val="solid"/>
-          </a:ln>
-        </p:spPr>
-        <p:txBody>
-          <a:bodyPr/>
-          <a:lstStyle/>
-          <a:p>
-            <a:endParaRPr lang="es-ES"/>
-          </a:p>
-        </p:txBody>
-      </p:sp>
-      <p:pic>
-        <p:nvPicPr>
-          <p:cNvPr id="14" name="Machine icon" descr="preencoded.png"/>
-          <p:cNvPicPr>
-            <a:picLocks noChangeAspect="1"/>
-          </p:cNvPicPr>
-          <p:nvPr/>
-        </p:nvPicPr>
-        <p:blipFill>
-          <a:blip r:embed="rId6"/>
-          <a:stretch>
-            <a:fillRect/>
-          </a:stretch>
-        </p:blipFill>
-        <p:spPr>
-          <a:xfrm>
-            <a:off x="5029200" y="5029200"/>
-            <a:ext cx="365760" cy="365760"/>
-          </a:xfrm>
-          <a:prstGeom prst="rect">
-            <a:avLst/>
-          </a:prstGeom>
-        </p:spPr>
-      </p:pic>
-      <p:sp>
-        <p:nvSpPr>
-          <p:cNvPr id="15" name="Machine label"/>
-          <p:cNvSpPr txBox="1"/>
-          <p:nvPr/>
-        </p:nvSpPr>
-        <p:spPr>
-          <a:xfrm>
-            <a:off x="4572000" y="5623560"/>
-            <a:ext cx="1280160" cy="320040"/>
-          </a:xfrm>
-          <a:prstGeom prst="rect">
-            <a:avLst/>
-          </a:prstGeom>
-          <a:noFill/>
-          <a:ln/>
-        </p:spPr>
-        <p:txBody>
-          <a:bodyPr wrap="square" rtlCol="0" anchor="ctr"/>
-          <a:lstStyle/>
-          <a:p>
-            <a:pPr marL="0" indent="0" algn="ctr">
-              <a:buNone/>
-            </a:pPr>
-            <a:r>
-              <a:rPr lang="en-US" sz="1200" dirty="0">
-                <a:solidFill>
-                  <a:schemeClr val="accent4"/>
-                </a:solidFill>
-              </a:rPr>
-              <a:t>Machine</a:t>
-            </a:r>
-            <a:endParaRPr lang="en-US" sz="1200" dirty="0"/>
-          </a:p>
-        </p:txBody>
-      </p:sp>
-      <p:sp>
-        <p:nvSpPr>
-          <p:cNvPr id="16" name="Deliveries circle"/>
-          <p:cNvSpPr/>
-          <p:nvPr/>
-        </p:nvSpPr>
-        <p:spPr>
-          <a:xfrm>
-            <a:off x="6217920" y="4846320"/>
-            <a:ext cx="731520" cy="731520"/>
-          </a:xfrm>
-          <a:prstGeom prst="ellipse">
-            <a:avLst/>
-          </a:prstGeom>
-          <a:solidFill>
-            <a:schemeClr val="tx2"/>
-          </a:solidFill>
-          <a:ln w="12700">
-            <a:solidFill>
-              <a:schemeClr val="tx2"/>
-            </a:solidFill>
-            <a:prstDash val="solid"/>
-          </a:ln>
-        </p:spPr>
-        <p:txBody>
-          <a:bodyPr/>
-          <a:lstStyle/>
-          <a:p>
-            <a:endParaRPr lang="es-ES"/>
-          </a:p>
-        </p:txBody>
-      </p:sp>
-      <p:pic>
-        <p:nvPicPr>
-          <p:cNvPr id="17" name="Deliveries icon" descr="preencoded.png"/>
-          <p:cNvPicPr>
-            <a:picLocks noChangeAspect="1"/>
-          </p:cNvPicPr>
-          <p:nvPr/>
-        </p:nvPicPr>
-        <p:blipFill>
-          <a:blip r:embed="rId7"/>
-          <a:stretch>
-            <a:fillRect/>
-          </a:stretch>
-        </p:blipFill>
-        <p:spPr>
-          <a:xfrm>
-            <a:off x="6400800" y="5029200"/>
-            <a:ext cx="365760" cy="365760"/>
-          </a:xfrm>
-          <a:prstGeom prst="rect">
-            <a:avLst/>
-          </a:prstGeom>
-        </p:spPr>
-      </p:pic>
-      <p:sp>
-        <p:nvSpPr>
-          <p:cNvPr id="18" name="Deliveries label"/>
-          <p:cNvSpPr txBox="1"/>
-          <p:nvPr/>
-        </p:nvSpPr>
-        <p:spPr>
-          <a:xfrm>
-            <a:off x="5943600" y="5623560"/>
-            <a:ext cx="1280160" cy="320040"/>
-          </a:xfrm>
-          <a:prstGeom prst="rect">
-            <a:avLst/>
-          </a:prstGeom>
-          <a:noFill/>
-          <a:ln/>
-        </p:spPr>
-        <p:txBody>
-          <a:bodyPr wrap="square" rtlCol="0" anchor="ctr"/>
-          <a:lstStyle/>
-          <a:p>
-            <a:pPr marL="0" indent="0" algn="ctr">
-              <a:buNone/>
-            </a:pPr>
-            <a:r>
-              <a:rPr lang="en-US" sz="1200" dirty="0">
-                <a:solidFill>
-                  <a:schemeClr val="accent4"/>
-                </a:solidFill>
-              </a:rPr>
-              <a:t>Deliveries</a:t>
-            </a:r>
-            <a:endParaRPr lang="en-US" sz="1200" dirty="0"/>
+            <a:endParaRPr lang="en-US" sz="2200" dirty="0"/>
           </a:p>
         </p:txBody>
       </p:sp>
@@ -2514,18 +2151,18 @@
       </p:grpSpPr>
       <p:sp>
         <p:nvSpPr>
-          <p:cNvPr id="2" name="Text 0"/>
+          <p:cNvPr id="2" name="Text 1"/>
           <p:cNvSpPr>
             <a:spLocks noGrp="1"/>
           </p:cNvSpPr>
           <p:nvPr>
-            <p:ph type="title" idx="100" hasCustomPrompt="1"/>
+            <p:ph type="title" idx="101" hasCustomPrompt="1"/>
           </p:nvPr>
         </p:nvSpPr>
         <p:spPr>
           <a:xfrm>
-            <a:off x="548640" y="457200"/>
-            <a:ext cx="11064240" cy="822960"/>
+            <a:off x="228600" y="0"/>
+            <a:ext cx="11704320" cy="777240"/>
           </a:xfrm>
           <a:prstGeom prst="rect">
             <a:avLst/>
@@ -2554,13 +2191,47 @@
       </p:sp>
       <p:sp>
         <p:nvSpPr>
-          <p:cNvPr id="3" name="Security circle"/>
+          <p:cNvPr id="3" name="Security card"/>
           <p:cNvSpPr/>
           <p:nvPr/>
         </p:nvSpPr>
         <p:spPr>
           <a:xfrm>
-            <a:off x="548640" y="1508760"/>
+            <a:off x="548640" y="1280160"/>
+            <a:ext cx="2606040" cy="3840480"/>
+          </a:xfrm>
+          <a:prstGeom prst="roundRect">
+            <a:avLst>
+              <a:gd name="adj" fmla="val 4211"/>
+            </a:avLst>
+          </a:prstGeom>
+          <a:solidFill>
+            <a:schemeClr val="bg2"/>
+          </a:solidFill>
+          <a:ln w="12700">
+            <a:solidFill>
+              <a:schemeClr val="bg2"/>
+            </a:solidFill>
+            <a:prstDash val="solid"/>
+          </a:ln>
+        </p:spPr>
+        <p:txBody>
+          <a:bodyPr/>
+          <a:lstStyle/>
+          <a:p>
+            <a:endParaRPr lang="es-ES"/>
+          </a:p>
+        </p:txBody>
+      </p:sp>
+      <p:sp>
+        <p:nvSpPr>
+          <p:cNvPr id="4" name="Security circle"/>
+          <p:cNvSpPr/>
+          <p:nvPr/>
+        </p:nvSpPr>
+        <p:spPr>
+          <a:xfrm>
+            <a:off x="777240" y="1508760"/>
             <a:ext cx="685800" cy="685800"/>
           </a:xfrm>
           <a:prstGeom prst="ellipse">
@@ -2586,7 +2257,7 @@
       </p:sp>
       <p:pic>
         <p:nvPicPr>
-          <p:cNvPr id="4" name="Security icon" descr="preencoded.png"/>
+          <p:cNvPr id="5" name="Security icon" descr="preencoded.png"/>
           <p:cNvPicPr>
             <a:picLocks noChangeAspect="1"/>
           </p:cNvPicPr>
@@ -2600,7 +2271,7 @@
         </p:blipFill>
         <p:spPr>
           <a:xfrm>
-            <a:off x="720090" y="1680210"/>
+            <a:off x="948690" y="1680210"/>
             <a:ext cx="342900" cy="342900"/>
           </a:xfrm>
           <a:prstGeom prst="rect">
@@ -2610,14 +2281,14 @@
       </p:pic>
       <p:sp>
         <p:nvSpPr>
-          <p:cNvPr id="5" name="Security title"/>
+          <p:cNvPr id="6" name="Security title"/>
           <p:cNvSpPr txBox="1"/>
           <p:nvPr/>
         </p:nvSpPr>
         <p:spPr>
           <a:xfrm>
-            <a:off x="548640" y="2331720"/>
-            <a:ext cx="2606040" cy="457200"/>
+            <a:off x="777240" y="2331720"/>
+            <a:ext cx="2240280" cy="457200"/>
           </a:xfrm>
           <a:prstGeom prst="rect">
             <a:avLst/>
@@ -2635,7 +2306,7 @@
             <a:r>
               <a:rPr lang="en-US" sz="1900" b="1" dirty="0">
                 <a:solidFill>
-                  <a:schemeClr val="bg1"/>
+                  <a:schemeClr val="tx1"/>
                 </a:solidFill>
               </a:rPr>
               <a:t>Security</a:t>
@@ -2646,14 +2317,14 @@
       </p:sp>
       <p:sp>
         <p:nvSpPr>
-          <p:cNvPr id="6" name="Security list"/>
+          <p:cNvPr id="7" name="Security list"/>
           <p:cNvSpPr txBox="1"/>
           <p:nvPr/>
         </p:nvSpPr>
         <p:spPr>
           <a:xfrm>
-            <a:off x="548640" y="2880360"/>
-            <a:ext cx="2606040" cy="3291840"/>
+            <a:off x="731520" y="2880360"/>
+            <a:ext cx="2286000" cy="3108960"/>
           </a:xfrm>
           <a:prstGeom prst="rect">
             <a:avLst/>
@@ -2675,7 +2346,7 @@
             <a:r>
               <a:rPr lang="en-US" sz="1400" dirty="0">
                 <a:solidFill>
-                  <a:schemeClr val="bg2"/>
+                  <a:schemeClr val="tx1"/>
                 </a:solidFill>
               </a:rPr>
               <a:t>Close direct service ports</a:t>
@@ -2693,7 +2364,7 @@
             <a:r>
               <a:rPr lang="en-US" sz="1400" dirty="0">
                 <a:solidFill>
-                  <a:schemeClr val="bg2"/>
+                  <a:schemeClr val="tx1"/>
                 </a:solidFill>
               </a:rPr>
               <a:t>Move secrets and certificates out of the repository</a:t>
@@ -2711,7 +2382,7 @@
             <a:r>
               <a:rPr lang="en-US" sz="1400" dirty="0">
                 <a:solidFill>
-                  <a:schemeClr val="bg2"/>
+                  <a:schemeClr val="tx1"/>
                 </a:solidFill>
               </a:rPr>
               <a:t>Protect the remaining read routes</a:t>
@@ -2722,13 +2393,47 @@
       </p:sp>
       <p:sp>
         <p:nvSpPr>
-          <p:cNvPr id="7" name="Chassis circle"/>
+          <p:cNvPr id="8" name="Chassis card"/>
           <p:cNvSpPr/>
           <p:nvPr/>
         </p:nvSpPr>
         <p:spPr>
           <a:xfrm>
-            <a:off x="3383280" y="1508760"/>
+            <a:off x="3383280" y="1280160"/>
+            <a:ext cx="2606040" cy="3840480"/>
+          </a:xfrm>
+          <a:prstGeom prst="roundRect">
+            <a:avLst>
+              <a:gd name="adj" fmla="val 4211"/>
+            </a:avLst>
+          </a:prstGeom>
+          <a:solidFill>
+            <a:schemeClr val="bg2"/>
+          </a:solidFill>
+          <a:ln w="12700">
+            <a:solidFill>
+              <a:schemeClr val="bg2"/>
+            </a:solidFill>
+            <a:prstDash val="solid"/>
+          </a:ln>
+        </p:spPr>
+        <p:txBody>
+          <a:bodyPr/>
+          <a:lstStyle/>
+          <a:p>
+            <a:endParaRPr lang="es-ES"/>
+          </a:p>
+        </p:txBody>
+      </p:sp>
+      <p:sp>
+        <p:nvSpPr>
+          <p:cNvPr id="9" name="Chassis circle"/>
+          <p:cNvSpPr/>
+          <p:nvPr/>
+        </p:nvSpPr>
+        <p:spPr>
+          <a:xfrm>
+            <a:off x="3611880" y="1508760"/>
             <a:ext cx="685800" cy="685800"/>
           </a:xfrm>
           <a:prstGeom prst="ellipse">
@@ -2754,7 +2459,7 @@
       </p:sp>
       <p:pic>
         <p:nvPicPr>
-          <p:cNvPr id="8" name="Chassis icon" descr="preencoded.png"/>
+          <p:cNvPr id="10" name="Chassis icon" descr="preencoded.png"/>
           <p:cNvPicPr>
             <a:picLocks noChangeAspect="1"/>
           </p:cNvPicPr>
@@ -2768,7 +2473,7 @@
         </p:blipFill>
         <p:spPr>
           <a:xfrm>
-            <a:off x="3554730" y="1680210"/>
+            <a:off x="3783330" y="1680210"/>
             <a:ext cx="342900" cy="342900"/>
           </a:xfrm>
           <a:prstGeom prst="rect">
@@ -2778,14 +2483,14 @@
       </p:pic>
       <p:sp>
         <p:nvSpPr>
-          <p:cNvPr id="9" name="Chassis title"/>
+          <p:cNvPr id="11" name="Chassis title"/>
           <p:cNvSpPr txBox="1"/>
           <p:nvPr/>
         </p:nvSpPr>
         <p:spPr>
           <a:xfrm>
-            <a:off x="3383280" y="2331720"/>
-            <a:ext cx="2606040" cy="457200"/>
+            <a:off x="3611880" y="2331720"/>
+            <a:ext cx="2240280" cy="457200"/>
           </a:xfrm>
           <a:prstGeom prst="rect">
             <a:avLst/>
@@ -2803,7 +2508,7 @@
             <a:r>
               <a:rPr lang="en-US" sz="1900" b="1" dirty="0">
                 <a:solidFill>
-                  <a:schemeClr val="bg1"/>
+                  <a:schemeClr val="tx1"/>
                 </a:solidFill>
               </a:rPr>
               <a:t>Chassis</a:t>
@@ -2814,14 +2519,14 @@
       </p:sp>
       <p:sp>
         <p:nvSpPr>
-          <p:cNvPr id="10" name="Chassis list"/>
+          <p:cNvPr id="12" name="Chassis list"/>
           <p:cNvSpPr txBox="1"/>
           <p:nvPr/>
         </p:nvSpPr>
         <p:spPr>
           <a:xfrm>
-            <a:off x="3383280" y="2880360"/>
-            <a:ext cx="2606040" cy="3291840"/>
+            <a:off x="3566160" y="2880360"/>
+            <a:ext cx="2286000" cy="3108960"/>
           </a:xfrm>
           <a:prstGeom prst="rect">
             <a:avLst/>
@@ -2843,7 +2548,7 @@
             <a:r>
               <a:rPr lang="en-US" sz="1400" dirty="0">
                 <a:solidFill>
-                  <a:schemeClr val="bg2"/>
+                  <a:schemeClr val="tx1"/>
                 </a:solidFill>
               </a:rPr>
               <a:t>Publish tagged releases instead of a vendored wheel only</a:t>
@@ -2861,7 +2566,7 @@
             <a:r>
               <a:rPr lang="en-US" sz="1400" dirty="0">
                 <a:solidFill>
-                  <a:schemeClr val="bg2"/>
+                  <a:schemeClr val="tx1"/>
                 </a:solidFill>
               </a:rPr>
               <a:t>Share the consumer contracts as a package</a:t>
@@ -2872,13 +2577,47 @@
       </p:sp>
       <p:sp>
         <p:nvSpPr>
-          <p:cNvPr id="11" name="Messaging circle"/>
+          <p:cNvPr id="13" name="Messaging card"/>
           <p:cNvSpPr/>
           <p:nvPr/>
         </p:nvSpPr>
         <p:spPr>
           <a:xfrm>
-            <a:off x="6217920" y="1508760"/>
+            <a:off x="6217920" y="1280160"/>
+            <a:ext cx="2606040" cy="3840480"/>
+          </a:xfrm>
+          <a:prstGeom prst="roundRect">
+            <a:avLst>
+              <a:gd name="adj" fmla="val 4211"/>
+            </a:avLst>
+          </a:prstGeom>
+          <a:solidFill>
+            <a:schemeClr val="bg2"/>
+          </a:solidFill>
+          <a:ln w="12700">
+            <a:solidFill>
+              <a:schemeClr val="bg2"/>
+            </a:solidFill>
+            <a:prstDash val="solid"/>
+          </a:ln>
+        </p:spPr>
+        <p:txBody>
+          <a:bodyPr/>
+          <a:lstStyle/>
+          <a:p>
+            <a:endParaRPr lang="es-ES"/>
+          </a:p>
+        </p:txBody>
+      </p:sp>
+      <p:sp>
+        <p:nvSpPr>
+          <p:cNvPr id="14" name="Messaging circle"/>
+          <p:cNvSpPr/>
+          <p:nvPr/>
+        </p:nvSpPr>
+        <p:spPr>
+          <a:xfrm>
+            <a:off x="6446520" y="1508760"/>
             <a:ext cx="685800" cy="685800"/>
           </a:xfrm>
           <a:prstGeom prst="ellipse">
@@ -2904,7 +2643,7 @@
       </p:sp>
       <p:pic>
         <p:nvPicPr>
-          <p:cNvPr id="12" name="Messaging icon" descr="preencoded.png"/>
+          <p:cNvPr id="15" name="Messaging icon" descr="preencoded.png"/>
           <p:cNvPicPr>
             <a:picLocks noChangeAspect="1"/>
           </p:cNvPicPr>
@@ -2918,7 +2657,7 @@
         </p:blipFill>
         <p:spPr>
           <a:xfrm>
-            <a:off x="6389370" y="1680210"/>
+            <a:off x="6617970" y="1680210"/>
             <a:ext cx="342900" cy="342900"/>
           </a:xfrm>
           <a:prstGeom prst="rect">
@@ -2928,14 +2667,14 @@
       </p:pic>
       <p:sp>
         <p:nvSpPr>
-          <p:cNvPr id="13" name="Messaging title"/>
+          <p:cNvPr id="16" name="Messaging title"/>
           <p:cNvSpPr txBox="1"/>
           <p:nvPr/>
         </p:nvSpPr>
         <p:spPr>
           <a:xfrm>
-            <a:off x="6217920" y="2331720"/>
-            <a:ext cx="2606040" cy="457200"/>
+            <a:off x="6446520" y="2331720"/>
+            <a:ext cx="2240280" cy="457200"/>
           </a:xfrm>
           <a:prstGeom prst="rect">
             <a:avLst/>
@@ -2953,7 +2692,7 @@
             <a:r>
               <a:rPr lang="en-US" sz="1900" b="1" dirty="0">
                 <a:solidFill>
-                  <a:schemeClr val="bg1"/>
+                  <a:schemeClr val="tx1"/>
                 </a:solidFill>
               </a:rPr>
               <a:t>Messaging</a:t>
@@ -2964,14 +2703,14 @@
       </p:sp>
       <p:sp>
         <p:nvSpPr>
-          <p:cNvPr id="14" name="Messaging list"/>
+          <p:cNvPr id="17" name="Messaging list"/>
           <p:cNvSpPr txBox="1"/>
           <p:nvPr/>
         </p:nvSpPr>
         <p:spPr>
           <a:xfrm>
-            <a:off x="6217920" y="2880360"/>
-            <a:ext cx="2606040" cy="3291840"/>
+            <a:off x="6400800" y="2880360"/>
+            <a:ext cx="2286000" cy="3108960"/>
           </a:xfrm>
           <a:prstGeom prst="rect">
             <a:avLst/>
@@ -2993,7 +2732,7 @@
             <a:r>
               <a:rPr lang="en-US" sz="1400" dirty="0">
                 <a:solidFill>
-                  <a:schemeClr val="bg2"/>
+                  <a:schemeClr val="tx1"/>
                 </a:solidFill>
               </a:rPr>
               <a:t>Dead-letter queue for rejected facts</a:t>
@@ -3011,7 +2750,7 @@
             <a:r>
               <a:rPr lang="en-US" sz="1400" dirty="0">
                 <a:solidFill>
-                  <a:schemeClr val="bg2"/>
+                  <a:schemeClr val="tx1"/>
                 </a:solidFill>
               </a:rPr>
               <a:t>Publish catalogue and key snapshots only when they change</a:t>
@@ -3029,7 +2768,7 @@
             <a:r>
               <a:rPr lang="en-US" sz="1400" dirty="0">
                 <a:solidFill>
-                  <a:schemeClr val="bg2"/>
+                  <a:schemeClr val="tx1"/>
                 </a:solidFill>
               </a:rPr>
               <a:t>Clean up old outbox and inbox rows</a:t>
@@ -3040,13 +2779,47 @@
       </p:sp>
       <p:sp>
         <p:nvSpPr>
-          <p:cNvPr id="15" name="Operations circle"/>
+          <p:cNvPr id="18" name="Operations card"/>
           <p:cNvSpPr/>
           <p:nvPr/>
         </p:nvSpPr>
         <p:spPr>
           <a:xfrm>
-            <a:off x="9052560" y="1508760"/>
+            <a:off x="9052560" y="1280160"/>
+            <a:ext cx="2606040" cy="3840480"/>
+          </a:xfrm>
+          <a:prstGeom prst="roundRect">
+            <a:avLst>
+              <a:gd name="adj" fmla="val 4211"/>
+            </a:avLst>
+          </a:prstGeom>
+          <a:solidFill>
+            <a:schemeClr val="bg2"/>
+          </a:solidFill>
+          <a:ln w="12700">
+            <a:solidFill>
+              <a:schemeClr val="bg2"/>
+            </a:solidFill>
+            <a:prstDash val="solid"/>
+          </a:ln>
+        </p:spPr>
+        <p:txBody>
+          <a:bodyPr/>
+          <a:lstStyle/>
+          <a:p>
+            <a:endParaRPr lang="es-ES"/>
+          </a:p>
+        </p:txBody>
+      </p:sp>
+      <p:sp>
+        <p:nvSpPr>
+          <p:cNvPr id="19" name="Operations circle"/>
+          <p:cNvSpPr/>
+          <p:nvPr/>
+        </p:nvSpPr>
+        <p:spPr>
+          <a:xfrm>
+            <a:off x="9281160" y="1508760"/>
             <a:ext cx="685800" cy="685800"/>
           </a:xfrm>
           <a:prstGeom prst="ellipse">
@@ -3072,7 +2845,7 @@
       </p:sp>
       <p:pic>
         <p:nvPicPr>
-          <p:cNvPr id="16" name="Operations icon" descr="preencoded.png"/>
+          <p:cNvPr id="20" name="Operations icon" descr="preencoded.png"/>
           <p:cNvPicPr>
             <a:picLocks noChangeAspect="1"/>
           </p:cNvPicPr>
@@ -3086,7 +2859,7 @@
         </p:blipFill>
         <p:spPr>
           <a:xfrm>
-            <a:off x="9224010" y="1680210"/>
+            <a:off x="9452610" y="1680210"/>
             <a:ext cx="342900" cy="342900"/>
           </a:xfrm>
           <a:prstGeom prst="rect">
@@ -3096,14 +2869,14 @@
       </p:pic>
       <p:sp>
         <p:nvSpPr>
-          <p:cNvPr id="17" name="Operations title"/>
+          <p:cNvPr id="21" name="Operations title"/>
           <p:cNvSpPr txBox="1"/>
           <p:nvPr/>
         </p:nvSpPr>
         <p:spPr>
           <a:xfrm>
-            <a:off x="9052560" y="2331720"/>
-            <a:ext cx="2606040" cy="457200"/>
+            <a:off x="9281160" y="2331720"/>
+            <a:ext cx="2240280" cy="457200"/>
           </a:xfrm>
           <a:prstGeom prst="rect">
             <a:avLst/>
@@ -3121,7 +2894,7 @@
             <a:r>
               <a:rPr lang="en-US" sz="1900" b="1" dirty="0">
                 <a:solidFill>
-                  <a:schemeClr val="bg1"/>
+                  <a:schemeClr val="tx1"/>
                 </a:solidFill>
               </a:rPr>
               <a:t>Operations</a:t>
@@ -3132,14 +2905,14 @@
       </p:sp>
       <p:sp>
         <p:nvSpPr>
-          <p:cNvPr id="18" name="Operations list"/>
+          <p:cNvPr id="22" name="Operations list"/>
           <p:cNvSpPr txBox="1"/>
           <p:nvPr/>
         </p:nvSpPr>
         <p:spPr>
           <a:xfrm>
-            <a:off x="9052560" y="2880360"/>
-            <a:ext cx="2606040" cy="3291840"/>
+            <a:off x="9235440" y="2880360"/>
+            <a:ext cx="2286000" cy="3108960"/>
           </a:xfrm>
           <a:prstGeom prst="rect">
             <a:avLst/>
@@ -3161,7 +2934,7 @@
             <a:r>
               <a:rPr lang="en-US" sz="1400" dirty="0">
                 <a:solidFill>
-                  <a:schemeClr val="bg2"/>
+                  <a:schemeClr val="tx1"/>
                 </a:solidFill>
               </a:rPr>
               <a:t>Remove legacy endpoints and flags</a:t>
@@ -3179,7 +2952,7 @@
             <a:r>
               <a:rPr lang="en-US" sz="1400" dirty="0">
                 <a:solidFill>
-                  <a:schemeClr val="bg2"/>
+                  <a:schemeClr val="tx1"/>
                 </a:solidFill>
               </a:rPr>
               <a:t>Restore broader test coverage</a:t>
@@ -3197,12 +2970,57 @@
             <a:r>
               <a:rPr lang="en-US" sz="1400" dirty="0">
                 <a:solidFill>
-                  <a:schemeClr val="bg2"/>
+                  <a:schemeClr val="tx1"/>
                 </a:solidFill>
               </a:rPr>
               <a:t>Monitoring and tests in CI</a:t>
             </a:r>
             <a:endParaRPr lang="en-US" sz="1400" dirty="0"/>
+          </a:p>
+        </p:txBody>
+      </p:sp>
+      <p:sp>
+        <p:nvSpPr>
+          <p:cNvPr id="25" name="Slide Number Placeholder 0"/>
+          <p:cNvSpPr>
+            <a:spLocks noGrp="1"/>
+          </p:cNvSpPr>
+          <p:nvPr>
+            <p:ph type="sldNum" sz="quarter" idx="4294967295"/>
+          </p:nvPr>
+        </p:nvSpPr>
+        <p:spPr>
+          <a:xfrm>
+            <a:off x="11430000" y="6510528"/>
+            <a:ext cx="502920" cy="274320"/>
+          </a:xfrm>
+          <a:prstGeom prst="rect">
+            <a:avLst/>
+          </a:prstGeom>
+          <a:extLst>
+            <a:ext uri="{C572A759-6A51-4108-AA02-DFA0A04FC94B}">
+              <ma14:wrappingTextBoxFlag xmlns:ma14="http://schemas.microsoft.com/office/mac/drawingml/2011/main" xmlns="" val="0"/>
+            </a:ext>
+          </a:extLst>
+        </p:spPr>
+        <p:txBody>
+          <a:bodyPr anchor="ctr"/>
+          <a:lstStyle>
+            <a:lvl1pPr>
+              <a:defRPr sz="1100">
+                <a:solidFill>
+                  <a:schemeClr val="bg1"/>
+                </a:solidFill>
+              </a:defRPr>
+            </a:lvl1pPr>
+          </a:lstStyle>
+          <a:p>
+            <a:pPr algn="ctr"/>
+            <a:fld id="{F7021451-1387-4CA6-816F-3879F97B5CBC}" type="slidenum">
+              <a:rPr lang="en-US" b="0"/>
+              <a:t>10</a:t>
+            </a:fld>
+            <a:endParaRPr lang="en-US"/>
           </a:p>
         </p:txBody>
       </p:sp>
@@ -3216,7 +3034,7 @@
 
 <file path=ppt/slides/slide11.xml><?xml version="1.0" encoding="utf-8"?>
 <p:sld xmlns:a="http://schemas.openxmlformats.org/drawingml/2006/main" xmlns:r="http://schemas.openxmlformats.org/officeDocument/2006/relationships" xmlns:p="http://schemas.openxmlformats.org/presentationml/2006/main">
-  <p:cSld>
+  <p:cSld name="Slide 11">
     <p:spTree>
       <p:nvGrpSpPr>
         <p:cNvPr id="1" name=""/>
@@ -3233,43 +3051,85 @@
       </p:grpSpPr>
       <p:sp>
         <p:nvSpPr>
-          <p:cNvPr id="2" name="Título 1">
-            <a:extLst>
-              <a:ext uri="{FF2B5EF4-FFF2-40B4-BE49-F238E27FC236}">
-                <a16:creationId xmlns:a16="http://schemas.microsoft.com/office/drawing/2014/main" id="{7D795850-124B-5DA0-74E8-1CD3C2E0F39A}"/>
-              </a:ext>
-            </a:extLst>
-          </p:cNvPr>
+          <p:cNvPr id="2" name="Text 1"/>
           <p:cNvSpPr>
             <a:spLocks noGrp="1"/>
           </p:cNvSpPr>
           <p:nvPr>
-            <p:ph type="title" idx="100"/>
+            <p:ph type="title" idx="102" hasCustomPrompt="1"/>
           </p:nvPr>
         </p:nvSpPr>
         <p:spPr>
           <a:xfrm>
-            <a:off x="2946238" y="2672887"/>
-            <a:ext cx="6299524" cy="1512225"/>
+            <a:off x="731520" y="1417320"/>
+            <a:ext cx="10698480" cy="1463040"/>
           </a:xfrm>
+          <a:prstGeom prst="rect">
+            <a:avLst/>
+          </a:prstGeom>
+          <a:noFill/>
+          <a:ln/>
         </p:spPr>
         <p:txBody>
-          <a:bodyPr/>
+          <a:bodyPr wrap="square" rtlCol="0" anchor="b"/>
           <a:lstStyle/>
           <a:p>
+            <a:pPr marL="0" indent="0" algn="ctr">
+              <a:buNone/>
+            </a:pPr>
             <a:r>
-              <a:rPr lang="es-ES" sz="8000" dirty="0"/>
+              <a:rPr lang="en-US" sz="4800" b="1" dirty="0">
+                <a:solidFill>
+                  <a:schemeClr val="bg1"/>
+                </a:solidFill>
+              </a:rPr>
               <a:t>Questions?</a:t>
             </a:r>
+            <a:endParaRPr lang="en-US" sz="4800" dirty="0"/>
+          </a:p>
+        </p:txBody>
+      </p:sp>
+      <p:sp>
+        <p:nvSpPr>
+          <p:cNvPr id="3" name="Text 1"/>
+          <p:cNvSpPr>
+            <a:spLocks noGrp="1"/>
+          </p:cNvSpPr>
+          <p:nvPr>
+            <p:ph type="body" idx="103" hasCustomPrompt="1"/>
+          </p:nvPr>
+        </p:nvSpPr>
+        <p:spPr>
+          <a:xfrm>
+            <a:off x="731520" y="2926080"/>
+            <a:ext cx="10698480" cy="914400"/>
+          </a:xfrm>
+          <a:prstGeom prst="rect">
+            <a:avLst/>
+          </a:prstGeom>
+          <a:noFill/>
+          <a:ln/>
+        </p:spPr>
+        <p:txBody>
+          <a:bodyPr wrap="square" rtlCol="0" anchor="t"/>
+          <a:lstStyle/>
+          <a:p>
+            <a:pPr marL="0" indent="0" algn="ctr">
+              <a:buNone/>
+            </a:pPr>
+            <a:r>
+              <a:rPr lang="en-US" sz="2200" b="1" dirty="0">
+                <a:solidFill>
+                  <a:schemeClr val="bg1"/>
+                </a:solidFill>
+              </a:rPr>
+              <a:t>Eskerrik asko!</a:t>
+            </a:r>
+            <a:endParaRPr lang="en-US" sz="2200" dirty="0"/>
           </a:p>
         </p:txBody>
       </p:sp>
     </p:spTree>
-    <p:extLst>
-      <p:ext uri="{BB962C8B-B14F-4D97-AF65-F5344CB8AC3E}">
-        <p14:creationId xmlns:p14="http://schemas.microsoft.com/office/powerpoint/2010/main" val="4187412274"/>
-      </p:ext>
-    </p:extLst>
   </p:cSld>
   <p:clrMapOvr>
     <a:masterClrMapping/>
@@ -3296,18 +3156,18 @@
       </p:grpSpPr>
       <p:sp>
         <p:nvSpPr>
-          <p:cNvPr id="2" name="Text 0"/>
+          <p:cNvPr id="2" name="Text 1"/>
           <p:cNvSpPr>
             <a:spLocks noGrp="1"/>
           </p:cNvSpPr>
           <p:nvPr>
-            <p:ph type="title" idx="100" hasCustomPrompt="1"/>
+            <p:ph type="title" idx="101" hasCustomPrompt="1"/>
           </p:nvPr>
         </p:nvSpPr>
         <p:spPr>
           <a:xfrm>
-            <a:off x="548640" y="320040"/>
-            <a:ext cx="11064240" cy="822960"/>
+            <a:off x="228600" y="0"/>
+            <a:ext cx="11704320" cy="777240"/>
           </a:xfrm>
           <a:prstGeom prst="rect">
             <a:avLst/>
@@ -3325,7 +3185,7 @@
             <a:r>
               <a:rPr lang="en-US" sz="3000" b="1" dirty="0">
                 <a:solidFill>
-                  <a:schemeClr val="tx1"/>
+                  <a:schemeClr val="bg1"/>
                 </a:solidFill>
               </a:rPr>
               <a:t>Architecture: 9 containers, no internal calls</a:t>
@@ -4600,31 +4460,31 @@
         </p:nvSpPr>
         <p:spPr>
           <a:xfrm>
-            <a:off x="11155680" y="6400800"/>
-            <a:ext cx="457200" cy="274320"/>
+            <a:off x="11430000" y="6510528"/>
+            <a:ext cx="502920" cy="274320"/>
           </a:xfrm>
           <a:prstGeom prst="rect">
             <a:avLst/>
           </a:prstGeom>
           <a:extLst>
             <a:ext uri="{C572A759-6A51-4108-AA02-DFA0A04FC94B}">
-              <ma14:wrappingTextBoxFlag xmlns="" xmlns:ma14="http://schemas.microsoft.com/office/mac/drawingml/2011/main" val="0"/>
+              <ma14:wrappingTextBoxFlag xmlns:ma14="http://schemas.microsoft.com/office/mac/drawingml/2011/main" xmlns="" val="0"/>
             </a:ext>
           </a:extLst>
         </p:spPr>
         <p:txBody>
-          <a:bodyPr/>
+          <a:bodyPr anchor="ctr"/>
           <a:lstStyle>
             <a:lvl1pPr>
-              <a:defRPr sz="1000">
+              <a:defRPr sz="1100">
                 <a:solidFill>
-                  <a:schemeClr val="accent4"/>
+                  <a:schemeClr val="bg1"/>
                 </a:solidFill>
               </a:defRPr>
             </a:lvl1pPr>
           </a:lstStyle>
           <a:p>
-            <a:pPr algn="r"/>
+            <a:pPr algn="ctr"/>
             <a:fld id="{F7021451-1387-4CA6-816F-3879F97B5CBC}" type="slidenum">
               <a:rPr lang="en-US" b="0"/>
               <a:t>2</a:t>
@@ -4660,18 +4520,18 @@
       </p:grpSpPr>
       <p:sp>
         <p:nvSpPr>
-          <p:cNvPr id="2" name="Text 0"/>
+          <p:cNvPr id="2" name="Text 1"/>
           <p:cNvSpPr>
             <a:spLocks noGrp="1"/>
           </p:cNvSpPr>
           <p:nvPr>
-            <p:ph type="title" idx="100" hasCustomPrompt="1"/>
+            <p:ph type="title" idx="101" hasCustomPrompt="1"/>
           </p:nvPr>
         </p:nvSpPr>
         <p:spPr>
           <a:xfrm>
-            <a:off x="548640" y="320040"/>
-            <a:ext cx="11064240" cy="822960"/>
+            <a:off x="228600" y="0"/>
+            <a:ext cx="11704320" cy="777240"/>
           </a:xfrm>
           <a:prstGeom prst="rect">
             <a:avLst/>
@@ -4689,7 +4549,7 @@
             <a:r>
               <a:rPr lang="en-US" sz="3000" b="1" dirty="0">
                 <a:solidFill>
-                  <a:schemeClr val="tx1"/>
+                  <a:schemeClr val="bg1"/>
                 </a:solidFill>
               </a:rPr>
               <a:t>Endpoints: Clients, Payments and Machine</a:t>
@@ -4908,7 +4768,7 @@
                       <a:tailEnd type="none" w="med" len="med"/>
                     </a:lnB>
                     <a:solidFill>
-                      <a:schemeClr val="tx1"/>
+                      <a:schemeClr val="accent1"/>
                     </a:solidFill>
                   </a:tcPr>
                 </a:tc>
@@ -4969,7 +4829,7 @@
                       <a:tailEnd type="none" w="med" len="med"/>
                     </a:lnB>
                     <a:solidFill>
-                      <a:schemeClr val="tx1"/>
+                      <a:schemeClr val="accent1"/>
                     </a:solidFill>
                   </a:tcPr>
                 </a:tc>
@@ -5030,7 +4890,7 @@
                       <a:tailEnd type="none" w="med" len="med"/>
                     </a:lnB>
                     <a:solidFill>
-                      <a:schemeClr val="tx1"/>
+                      <a:schemeClr val="accent1"/>
                     </a:solidFill>
                   </a:tcPr>
                 </a:tc>
@@ -5091,7 +4951,7 @@
                       <a:tailEnd type="none" w="med" len="med"/>
                     </a:lnB>
                     <a:solidFill>
-                      <a:schemeClr val="tx1"/>
+                      <a:schemeClr val="accent1"/>
                     </a:solidFill>
                   </a:tcPr>
                 </a:tc>
@@ -7895,7 +7755,7 @@
                       <a:tailEnd type="none" w="med" len="med"/>
                     </a:lnB>
                     <a:solidFill>
-                      <a:schemeClr val="tx1"/>
+                      <a:schemeClr val="accent1"/>
                     </a:solidFill>
                   </a:tcPr>
                 </a:tc>
@@ -7956,7 +7816,7 @@
                       <a:tailEnd type="none" w="med" len="med"/>
                     </a:lnB>
                     <a:solidFill>
-                      <a:schemeClr val="tx1"/>
+                      <a:schemeClr val="accent1"/>
                     </a:solidFill>
                   </a:tcPr>
                 </a:tc>
@@ -8017,7 +7877,7 @@
                       <a:tailEnd type="none" w="med" len="med"/>
                     </a:lnB>
                     <a:solidFill>
-                      <a:schemeClr val="tx1"/>
+                      <a:schemeClr val="accent1"/>
                     </a:solidFill>
                   </a:tcPr>
                 </a:tc>
@@ -8078,7 +7938,7 @@
                       <a:tailEnd type="none" w="med" len="med"/>
                     </a:lnB>
                     <a:solidFill>
-                      <a:schemeClr val="tx1"/>
+                      <a:schemeClr val="accent1"/>
                     </a:solidFill>
                   </a:tcPr>
                 </a:tc>
@@ -9592,7 +9452,7 @@
                       <a:tailEnd type="none" w="med" len="med"/>
                     </a:lnB>
                     <a:solidFill>
-                      <a:schemeClr val="tx1"/>
+                      <a:schemeClr val="accent1"/>
                     </a:solidFill>
                   </a:tcPr>
                 </a:tc>
@@ -9653,7 +9513,7 @@
                       <a:tailEnd type="none" w="med" len="med"/>
                     </a:lnB>
                     <a:solidFill>
-                      <a:schemeClr val="tx1"/>
+                      <a:schemeClr val="accent1"/>
                     </a:solidFill>
                   </a:tcPr>
                 </a:tc>
@@ -9714,7 +9574,7 @@
                       <a:tailEnd type="none" w="med" len="med"/>
                     </a:lnB>
                     <a:solidFill>
-                      <a:schemeClr val="tx1"/>
+                      <a:schemeClr val="accent1"/>
                     </a:solidFill>
                   </a:tcPr>
                 </a:tc>
@@ -9775,7 +9635,7 @@
                       <a:tailEnd type="none" w="med" len="med"/>
                     </a:lnB>
                     <a:solidFill>
-                      <a:schemeClr val="tx1"/>
+                      <a:schemeClr val="accent1"/>
                     </a:solidFill>
                   </a:tcPr>
                 </a:tc>
@@ -10575,31 +10435,31 @@
         </p:nvSpPr>
         <p:spPr>
           <a:xfrm>
-            <a:off x="11155680" y="6400800"/>
-            <a:ext cx="457200" cy="274320"/>
+            <a:off x="11430000" y="6510528"/>
+            <a:ext cx="502920" cy="274320"/>
           </a:xfrm>
           <a:prstGeom prst="rect">
             <a:avLst/>
           </a:prstGeom>
           <a:extLst>
             <a:ext uri="{C572A759-6A51-4108-AA02-DFA0A04FC94B}">
-              <ma14:wrappingTextBoxFlag xmlns="" xmlns:ma14="http://schemas.microsoft.com/office/mac/drawingml/2011/main" val="0"/>
+              <ma14:wrappingTextBoxFlag xmlns:ma14="http://schemas.microsoft.com/office/mac/drawingml/2011/main" xmlns="" val="0"/>
             </a:ext>
           </a:extLst>
         </p:spPr>
         <p:txBody>
-          <a:bodyPr/>
+          <a:bodyPr anchor="ctr"/>
           <a:lstStyle>
             <a:lvl1pPr>
-              <a:defRPr sz="1000">
+              <a:defRPr sz="1100">
                 <a:solidFill>
-                  <a:schemeClr val="accent4"/>
+                  <a:schemeClr val="bg1"/>
                 </a:solidFill>
               </a:defRPr>
             </a:lvl1pPr>
           </a:lstStyle>
           <a:p>
-            <a:pPr algn="r"/>
+            <a:pPr algn="ctr"/>
             <a:fld id="{F7021451-1387-4CA6-816F-3879F97B5CBC}" type="slidenum">
               <a:rPr lang="en-US" b="0"/>
               <a:t>3</a:t>
@@ -10635,18 +10495,18 @@
       </p:grpSpPr>
       <p:sp>
         <p:nvSpPr>
-          <p:cNvPr id="2" name="Text 0"/>
+          <p:cNvPr id="2" name="Text 1"/>
           <p:cNvSpPr>
             <a:spLocks noGrp="1"/>
           </p:cNvSpPr>
           <p:nvPr>
-            <p:ph type="title" idx="100" hasCustomPrompt="1"/>
+            <p:ph type="title" idx="101" hasCustomPrompt="1"/>
           </p:nvPr>
         </p:nvSpPr>
         <p:spPr>
           <a:xfrm>
-            <a:off x="548640" y="320040"/>
-            <a:ext cx="11064240" cy="822960"/>
+            <a:off x="228600" y="0"/>
+            <a:ext cx="11704320" cy="777240"/>
           </a:xfrm>
           <a:prstGeom prst="rect">
             <a:avLst/>
@@ -10664,7 +10524,7 @@
             <a:r>
               <a:rPr lang="en-US" sz="3000" b="1" dirty="0">
                 <a:solidFill>
-                  <a:schemeClr val="tx1"/>
+                  <a:schemeClr val="bg1"/>
                 </a:solidFill>
               </a:rPr>
               <a:t>Endpoints: Orders and Deliveries</a:t>
@@ -10789,7 +10649,7 @@
         </p:nvGraphicFramePr>
         <p:xfrm>
           <a:off x="548640" y="1920240"/>
-          <a:ext cx="6309360" cy="3968496"/>
+          <a:ext cx="6309360" cy="914400"/>
         </p:xfrm>
         <a:graphic>
           <a:graphicData uri="http://schemas.openxmlformats.org/drawingml/2006/table">
@@ -10883,7 +10743,7 @@
                       <a:tailEnd type="none" w="med" len="med"/>
                     </a:lnB>
                     <a:solidFill>
-                      <a:schemeClr val="tx1"/>
+                      <a:schemeClr val="accent1"/>
                     </a:solidFill>
                   </a:tcPr>
                 </a:tc>
@@ -10944,7 +10804,7 @@
                       <a:tailEnd type="none" w="med" len="med"/>
                     </a:lnB>
                     <a:solidFill>
-                      <a:schemeClr val="tx1"/>
+                      <a:schemeClr val="accent1"/>
                     </a:solidFill>
                   </a:tcPr>
                 </a:tc>
@@ -11005,7 +10865,7 @@
                       <a:tailEnd type="none" w="med" len="med"/>
                     </a:lnB>
                     <a:solidFill>
-                      <a:schemeClr val="tx1"/>
+                      <a:schemeClr val="accent1"/>
                     </a:solidFill>
                   </a:tcPr>
                 </a:tc>
@@ -11066,7 +10926,7 @@
                       <a:tailEnd type="none" w="med" len="med"/>
                     </a:lnB>
                     <a:solidFill>
-                      <a:schemeClr val="tx1"/>
+                      <a:schemeClr val="accent1"/>
                     </a:solidFill>
                   </a:tcPr>
                 </a:tc>
@@ -14550,7 +14410,7 @@
         </p:nvGraphicFramePr>
         <p:xfrm>
           <a:off x="7132320" y="1920240"/>
-          <a:ext cx="4480560" cy="1984248"/>
+          <a:ext cx="4480560" cy="914400"/>
         </p:xfrm>
         <a:graphic>
           <a:graphicData uri="http://schemas.openxmlformats.org/drawingml/2006/table">
@@ -14644,7 +14504,7 @@
                       <a:tailEnd type="none" w="med" len="med"/>
                     </a:lnB>
                     <a:solidFill>
-                      <a:schemeClr val="tx1"/>
+                      <a:schemeClr val="accent1"/>
                     </a:solidFill>
                   </a:tcPr>
                 </a:tc>
@@ -14705,7 +14565,7 @@
                       <a:tailEnd type="none" w="med" len="med"/>
                     </a:lnB>
                     <a:solidFill>
-                      <a:schemeClr val="tx1"/>
+                      <a:schemeClr val="accent1"/>
                     </a:solidFill>
                   </a:tcPr>
                 </a:tc>
@@ -14766,7 +14626,7 @@
                       <a:tailEnd type="none" w="med" len="med"/>
                     </a:lnB>
                     <a:solidFill>
-                      <a:schemeClr val="tx1"/>
+                      <a:schemeClr val="accent1"/>
                     </a:solidFill>
                   </a:tcPr>
                 </a:tc>
@@ -14827,7 +14687,7 @@
                       <a:tailEnd type="none" w="med" len="med"/>
                     </a:lnB>
                     <a:solidFill>
-                      <a:schemeClr val="tx1"/>
+                      <a:schemeClr val="accent1"/>
                     </a:solidFill>
                   </a:tcPr>
                 </a:tc>
@@ -16485,31 +16345,31 @@
         </p:nvSpPr>
         <p:spPr>
           <a:xfrm>
-            <a:off x="11155680" y="6400800"/>
-            <a:ext cx="457200" cy="274320"/>
+            <a:off x="11430000" y="6510528"/>
+            <a:ext cx="502920" cy="274320"/>
           </a:xfrm>
           <a:prstGeom prst="rect">
             <a:avLst/>
           </a:prstGeom>
           <a:extLst>
             <a:ext uri="{C572A759-6A51-4108-AA02-DFA0A04FC94B}">
-              <ma14:wrappingTextBoxFlag xmlns="" xmlns:ma14="http://schemas.microsoft.com/office/mac/drawingml/2011/main" val="0"/>
+              <ma14:wrappingTextBoxFlag xmlns:ma14="http://schemas.microsoft.com/office/mac/drawingml/2011/main" xmlns="" val="0"/>
             </a:ext>
           </a:extLst>
         </p:spPr>
         <p:txBody>
-          <a:bodyPr/>
+          <a:bodyPr anchor="ctr"/>
           <a:lstStyle>
             <a:lvl1pPr>
-              <a:defRPr sz="1000">
+              <a:defRPr sz="1100">
                 <a:solidFill>
-                  <a:schemeClr val="accent4"/>
+                  <a:schemeClr val="bg1"/>
                 </a:solidFill>
               </a:defRPr>
             </a:lvl1pPr>
           </a:lstStyle>
           <a:p>
-            <a:pPr algn="r"/>
+            <a:pPr algn="ctr"/>
             <a:fld id="{F7021451-1387-4CA6-816F-3879F97B5CBC}" type="slidenum">
               <a:rPr lang="en-US" b="0"/>
               <a:t>4</a:t>
@@ -16545,18 +16405,18 @@
       </p:grpSpPr>
       <p:sp>
         <p:nvSpPr>
-          <p:cNvPr id="2" name="Text 0"/>
+          <p:cNvPr id="2" name="Text 1"/>
           <p:cNvSpPr>
             <a:spLocks noGrp="1"/>
           </p:cNvSpPr>
           <p:nvPr>
-            <p:ph type="title" idx="100" hasCustomPrompt="1"/>
+            <p:ph type="title" idx="101" hasCustomPrompt="1"/>
           </p:nvPr>
         </p:nvSpPr>
         <p:spPr>
           <a:xfrm>
-            <a:off x="548640" y="320040"/>
-            <a:ext cx="11064240" cy="822960"/>
+            <a:off x="228600" y="0"/>
+            <a:ext cx="11704320" cy="777240"/>
           </a:xfrm>
           <a:prstGeom prst="rect">
             <a:avLst/>
@@ -16574,7 +16434,7 @@
             <a:r>
               <a:rPr lang="en-US" sz="3000" b="1" dirty="0">
                 <a:solidFill>
-                  <a:schemeClr val="tx1"/>
+                  <a:schemeClr val="bg1"/>
                 </a:solidFill>
               </a:rPr>
               <a:t>Choreography on one topic exchange</a:t>
@@ -16619,31 +16479,31 @@
         </p:nvSpPr>
         <p:spPr>
           <a:xfrm>
-            <a:off x="11155680" y="6400800"/>
-            <a:ext cx="457200" cy="274320"/>
+            <a:off x="11430000" y="6510528"/>
+            <a:ext cx="502920" cy="274320"/>
           </a:xfrm>
           <a:prstGeom prst="rect">
             <a:avLst/>
           </a:prstGeom>
           <a:extLst>
             <a:ext uri="{C572A759-6A51-4108-AA02-DFA0A04FC94B}">
-              <ma14:wrappingTextBoxFlag xmlns="" xmlns:ma14="http://schemas.microsoft.com/office/mac/drawingml/2011/main" val="0"/>
+              <ma14:wrappingTextBoxFlag xmlns:ma14="http://schemas.microsoft.com/office/mac/drawingml/2011/main" xmlns="" val="0"/>
             </a:ext>
           </a:extLst>
         </p:spPr>
         <p:txBody>
-          <a:bodyPr/>
+          <a:bodyPr anchor="ctr"/>
           <a:lstStyle>
             <a:lvl1pPr>
-              <a:defRPr sz="1000">
+              <a:defRPr sz="1100">
                 <a:solidFill>
-                  <a:schemeClr val="accent4"/>
+                  <a:schemeClr val="bg1"/>
                 </a:solidFill>
               </a:defRPr>
             </a:lvl1pPr>
           </a:lstStyle>
           <a:p>
-            <a:pPr algn="r"/>
+            <a:pPr algn="ctr"/>
             <a:fld id="{F7021451-1387-4CA6-816F-3879F97B5CBC}" type="slidenum">
               <a:rPr lang="en-US" b="0"/>
               <a:t>5</a:t>
@@ -16679,18 +16539,18 @@
       </p:grpSpPr>
       <p:sp>
         <p:nvSpPr>
-          <p:cNvPr id="2" name="Text 0"/>
+          <p:cNvPr id="2" name="Text 1"/>
           <p:cNvSpPr>
             <a:spLocks noGrp="1"/>
           </p:cNvSpPr>
           <p:nvPr>
-            <p:ph type="title" idx="100" hasCustomPrompt="1"/>
+            <p:ph type="title" idx="101" hasCustomPrompt="1"/>
           </p:nvPr>
         </p:nvSpPr>
         <p:spPr>
           <a:xfrm>
-            <a:off x="548640" y="320040"/>
-            <a:ext cx="11064240" cy="822960"/>
+            <a:off x="228600" y="0"/>
+            <a:ext cx="11704320" cy="777240"/>
           </a:xfrm>
           <a:prstGeom prst="rect">
             <a:avLst/>
@@ -16708,7 +16568,7 @@
             <a:r>
               <a:rPr lang="en-US" sz="3000" b="1" dirty="0">
                 <a:solidFill>
-                  <a:schemeClr val="tx1"/>
+                  <a:schemeClr val="bg1"/>
                 </a:solidFill>
               </a:rPr>
               <a:t>Exchange, queues and topics</a:t>
@@ -16733,7 +16593,7 @@
         </p:nvGraphicFramePr>
         <p:xfrm>
           <a:off x="548640" y="1280160"/>
-          <a:ext cx="7772400" cy="4358640"/>
+          <a:ext cx="7772400" cy="914400"/>
         </p:xfrm>
         <a:graphic>
           <a:graphicData uri="http://schemas.openxmlformats.org/drawingml/2006/table">
@@ -16820,7 +16680,7 @@
                       <a:tailEnd type="none" w="med" len="med"/>
                     </a:lnB>
                     <a:solidFill>
-                      <a:schemeClr val="tx1"/>
+                      <a:schemeClr val="accent1"/>
                     </a:solidFill>
                   </a:tcPr>
                 </a:tc>
@@ -16881,7 +16741,7 @@
                       <a:tailEnd type="none" w="med" len="med"/>
                     </a:lnB>
                     <a:solidFill>
-                      <a:schemeClr val="tx1"/>
+                      <a:schemeClr val="accent1"/>
                     </a:solidFill>
                   </a:tcPr>
                 </a:tc>
@@ -16942,7 +16802,7 @@
                       <a:tailEnd type="none" w="med" len="med"/>
                     </a:lnB>
                     <a:solidFill>
-                      <a:schemeClr val="tx1"/>
+                      <a:schemeClr val="accent1"/>
                     </a:solidFill>
                   </a:tcPr>
                 </a:tc>
@@ -19260,31 +19120,31 @@
         </p:nvSpPr>
         <p:spPr>
           <a:xfrm>
-            <a:off x="11155680" y="6400800"/>
-            <a:ext cx="457200" cy="274320"/>
+            <a:off x="11430000" y="6510528"/>
+            <a:ext cx="502920" cy="274320"/>
           </a:xfrm>
           <a:prstGeom prst="rect">
             <a:avLst/>
           </a:prstGeom>
           <a:extLst>
             <a:ext uri="{C572A759-6A51-4108-AA02-DFA0A04FC94B}">
-              <ma14:wrappingTextBoxFlag xmlns="" xmlns:ma14="http://schemas.microsoft.com/office/mac/drawingml/2011/main" val="0"/>
+              <ma14:wrappingTextBoxFlag xmlns:ma14="http://schemas.microsoft.com/office/mac/drawingml/2011/main" xmlns="" val="0"/>
             </a:ext>
           </a:extLst>
         </p:spPr>
         <p:txBody>
-          <a:bodyPr/>
+          <a:bodyPr anchor="ctr"/>
           <a:lstStyle>
             <a:lvl1pPr>
-              <a:defRPr sz="1000">
+              <a:defRPr sz="1100">
                 <a:solidFill>
-                  <a:schemeClr val="accent4"/>
+                  <a:schemeClr val="bg1"/>
                 </a:solidFill>
               </a:defRPr>
             </a:lvl1pPr>
           </a:lstStyle>
           <a:p>
-            <a:pPr algn="r"/>
+            <a:pPr algn="ctr"/>
             <a:fld id="{F7021451-1387-4CA6-816F-3879F97B5CBC}" type="slidenum">
               <a:rPr lang="en-US" b="0"/>
               <a:t>6</a:t>
@@ -19320,18 +19180,18 @@
       </p:grpSpPr>
       <p:sp>
         <p:nvSpPr>
-          <p:cNvPr id="2" name="Text 0"/>
+          <p:cNvPr id="2" name="Text 1"/>
           <p:cNvSpPr>
             <a:spLocks noGrp="1"/>
           </p:cNvSpPr>
           <p:nvPr>
-            <p:ph type="title" idx="100" hasCustomPrompt="1"/>
+            <p:ph type="title" idx="101" hasCustomPrompt="1"/>
           </p:nvPr>
         </p:nvSpPr>
         <p:spPr>
           <a:xfrm>
-            <a:off x="548640" y="320040"/>
-            <a:ext cx="11064240" cy="822960"/>
+            <a:off x="228600" y="0"/>
+            <a:ext cx="11704320" cy="777240"/>
           </a:xfrm>
           <a:prstGeom prst="rect">
             <a:avLst/>
@@ -19349,7 +19209,7 @@
             <a:r>
               <a:rPr lang="en-US" sz="3000" b="1" dirty="0">
                 <a:solidFill>
-                  <a:schemeClr val="tx1"/>
+                  <a:schemeClr val="bg1"/>
                 </a:solidFill>
               </a:rPr>
               <a:t>Security measures</a:t>
@@ -20378,31 +20238,31 @@
         </p:nvSpPr>
         <p:spPr>
           <a:xfrm>
-            <a:off x="11155680" y="6400800"/>
-            <a:ext cx="457200" cy="274320"/>
+            <a:off x="11430000" y="6510528"/>
+            <a:ext cx="502920" cy="274320"/>
           </a:xfrm>
           <a:prstGeom prst="rect">
             <a:avLst/>
           </a:prstGeom>
           <a:extLst>
             <a:ext uri="{C572A759-6A51-4108-AA02-DFA0A04FC94B}">
-              <ma14:wrappingTextBoxFlag xmlns="" xmlns:ma14="http://schemas.microsoft.com/office/mac/drawingml/2011/main" val="0"/>
+              <ma14:wrappingTextBoxFlag xmlns:ma14="http://schemas.microsoft.com/office/mac/drawingml/2011/main" xmlns="" val="0"/>
             </a:ext>
           </a:extLst>
         </p:spPr>
         <p:txBody>
-          <a:bodyPr/>
+          <a:bodyPr anchor="ctr"/>
           <a:lstStyle>
             <a:lvl1pPr>
-              <a:defRPr sz="1000">
+              <a:defRPr sz="1100">
                 <a:solidFill>
-                  <a:schemeClr val="accent4"/>
+                  <a:schemeClr val="bg1"/>
                 </a:solidFill>
               </a:defRPr>
             </a:lvl1pPr>
           </a:lstStyle>
           <a:p>
-            <a:pPr algn="r"/>
+            <a:pPr algn="ctr"/>
             <a:fld id="{F7021451-1387-4CA6-816F-3879F97B5CBC}" type="slidenum">
               <a:rPr lang="en-US" b="0"/>
               <a:t>7</a:t>
@@ -20438,18 +20298,18 @@
       </p:grpSpPr>
       <p:sp>
         <p:nvSpPr>
-          <p:cNvPr id="2" name="Text 0"/>
+          <p:cNvPr id="2" name="Text 1"/>
           <p:cNvSpPr>
             <a:spLocks noGrp="1"/>
           </p:cNvSpPr>
           <p:nvPr>
-            <p:ph type="title" idx="100" hasCustomPrompt="1"/>
+            <p:ph type="title" idx="101" hasCustomPrompt="1"/>
           </p:nvPr>
         </p:nvSpPr>
         <p:spPr>
           <a:xfrm>
-            <a:off x="548640" y="320040"/>
-            <a:ext cx="11064240" cy="822960"/>
+            <a:off x="228600" y="0"/>
+            <a:ext cx="11704320" cy="777240"/>
           </a:xfrm>
           <a:prstGeom prst="rect">
             <a:avLst/>
@@ -20467,7 +20327,7 @@
             <a:r>
               <a:rPr lang="en-US" sz="3000" b="1" dirty="0">
                 <a:solidFill>
-                  <a:schemeClr val="tx1"/>
+                  <a:schemeClr val="bg1"/>
                 </a:solidFill>
               </a:rPr>
               <a:t>Functionalities moved to the microservice chassis</a:t>
@@ -20705,28 +20565,28 @@
         </p:nvGraphicFramePr>
         <p:xfrm>
           <a:off x="4389120" y="1280160"/>
-          <a:ext cx="7223760" cy="4096512"/>
+          <a:ext cx="7223760" cy="914400"/>
         </p:xfrm>
         <a:graphic>
           <a:graphicData uri="http://schemas.openxmlformats.org/drawingml/2006/table">
             <a:tbl>
               <a:tblPr/>
               <a:tblGrid>
-                <a:gridCol w="1828800">
+                <a:gridCol w="1965960">
                   <a:extLst>
                     <a:ext uri="{9D8B030D-6E8A-4147-A177-3AD203B41FA5}">
                       <a16:colId xmlns:a16="http://schemas.microsoft.com/office/drawing/2014/main" val="20000"/>
                     </a:ext>
                   </a:extLst>
                 </a:gridCol>
-                <a:gridCol w="3520440">
+                <a:gridCol w="3246120">
                   <a:extLst>
                     <a:ext uri="{9D8B030D-6E8A-4147-A177-3AD203B41FA5}">
                       <a16:colId xmlns:a16="http://schemas.microsoft.com/office/drawing/2014/main" val="20001"/>
                     </a:ext>
                   </a:extLst>
                 </a:gridCol>
-                <a:gridCol w="1874520">
+                <a:gridCol w="2011680">
                   <a:extLst>
                     <a:ext uri="{9D8B030D-6E8A-4147-A177-3AD203B41FA5}">
                       <a16:colId xmlns:a16="http://schemas.microsoft.com/office/drawing/2014/main" val="20002"/>
@@ -20734,7 +20594,7 @@
                   </a:extLst>
                 </a:gridCol>
               </a:tblGrid>
-              <a:tr h="585216">
+              <a:tr h="512064">
                 <a:tc>
                   <a:txBody>
                     <a:bodyPr/>
@@ -20792,7 +20652,7 @@
                       <a:tailEnd type="none" w="med" len="med"/>
                     </a:lnB>
                     <a:solidFill>
-                      <a:schemeClr val="tx1"/>
+                      <a:schemeClr val="accent1"/>
                     </a:solidFill>
                   </a:tcPr>
                 </a:tc>
@@ -20853,7 +20713,7 @@
                       <a:tailEnd type="none" w="med" len="med"/>
                     </a:lnB>
                     <a:solidFill>
-                      <a:schemeClr val="tx1"/>
+                      <a:schemeClr val="accent1"/>
                     </a:solidFill>
                   </a:tcPr>
                 </a:tc>
@@ -20914,7 +20774,7 @@
                       <a:tailEnd type="none" w="med" len="med"/>
                     </a:lnB>
                     <a:solidFill>
-                      <a:schemeClr val="tx1"/>
+                      <a:schemeClr val="accent1"/>
                     </a:solidFill>
                   </a:tcPr>
                 </a:tc>
@@ -20924,7 +20784,7 @@
                   </a:ext>
                 </a:extLst>
               </a:tr>
-              <a:tr h="585216">
+              <a:tr h="512064">
                 <a:tc>
                   <a:txBody>
                     <a:bodyPr/>
@@ -21114,7 +20974,7 @@
                   </a:ext>
                 </a:extLst>
               </a:tr>
-              <a:tr h="585216">
+              <a:tr h="512064">
                 <a:tc>
                   <a:txBody>
                     <a:bodyPr/>
@@ -21304,7 +21164,7 @@
                   </a:ext>
                 </a:extLst>
               </a:tr>
-              <a:tr h="585216">
+              <a:tr h="512064">
                 <a:tc>
                   <a:txBody>
                     <a:bodyPr/>
@@ -21494,7 +21354,7 @@
                   </a:ext>
                 </a:extLst>
               </a:tr>
-              <a:tr h="585216">
+              <a:tr h="512064">
                 <a:tc>
                   <a:txBody>
                     <a:bodyPr/>
@@ -21684,7 +21544,7 @@
                   </a:ext>
                 </a:extLst>
               </a:tr>
-              <a:tr h="585216">
+              <a:tr h="512064">
                 <a:tc>
                   <a:txBody>
                     <a:bodyPr/>
@@ -21760,7 +21620,7 @@
                             <a:schemeClr val="tx1"/>
                           </a:solidFill>
                         </a:rPr>
-                        <a:t>Engine and session factory per service database</a:t>
+                        <a:t>Engine and session factory per database</a:t>
                       </a:r>
                       <a:endParaRPr lang="en-US" sz="1300" dirty="0"/>
                     </a:p>
@@ -21821,7 +21681,7 @@
                             <a:schemeClr val="tx1"/>
                           </a:solidFill>
                         </a:rPr>
-                        <a:t>All databases</a:t>
+                        <a:t>All five service SQLite databases</a:t>
                       </a:r>
                       <a:endParaRPr lang="en-US" sz="1300" dirty="0"/>
                     </a:p>
@@ -21874,7 +21734,7 @@
                   </a:ext>
                 </a:extLst>
               </a:tr>
-              <a:tr h="585216">
+              <a:tr h="512064">
                 <a:tc>
                   <a:txBody>
                     <a:bodyPr/>
@@ -21889,7 +21749,7 @@
                             <a:schemeClr val="tx1"/>
                           </a:solidFill>
                         </a:rPr>
-                        <a:t>Logging and /health</a:t>
+                        <a:t>configure_logging</a:t>
                       </a:r>
                       <a:endParaRPr lang="en-US" sz="1300" dirty="0"/>
                     </a:p>
@@ -21950,7 +21810,7 @@
                             <a:schemeClr val="tx1"/>
                           </a:solidFill>
                         </a:rPr>
-                        <a:t>Common log format and health endpoint</a:t>
+                        <a:t>Common log format with the service name</a:t>
                       </a:r>
                       <a:endParaRPr lang="en-US" sz="1300" dirty="0"/>
                     </a:p>
@@ -22011,7 +21871,7 @@
                             <a:schemeClr val="tx1"/>
                           </a:solidFill>
                         </a:rPr>
-                        <a:t>Orders, payments, logger</a:t>
+                        <a:t>Orders, payments, event logger</a:t>
                       </a:r>
                       <a:endParaRPr lang="en-US" sz="1300" dirty="0"/>
                     </a:p>
@@ -22061,6 +21921,196 @@
                 <a:extLst>
                   <a:ext uri="{0D108BD9-81ED-4DB2-BD59-A6C34878D82A}">
                     <a16:rowId xmlns:a16="http://schemas.microsoft.com/office/drawing/2014/main" val="10006"/>
+                  </a:ext>
+                </a:extLst>
+              </a:tr>
+              <a:tr h="512064">
+                <a:tc>
+                  <a:txBody>
+                    <a:bodyPr/>
+                    <a:lstStyle/>
+                    <a:p>
+                      <a:pPr marL="0" indent="0">
+                        <a:buNone/>
+                      </a:pPr>
+                      <a:r>
+                        <a:rPr lang="en-US" sz="1300" dirty="0">
+                          <a:solidFill>
+                            <a:schemeClr val="tx1"/>
+                          </a:solidFill>
+                        </a:rPr>
+                        <a:t>create_health_router</a:t>
+                      </a:r>
+                      <a:endParaRPr lang="en-US" sz="1300" dirty="0"/>
+                    </a:p>
+                  </a:txBody>
+                  <a:tcPr anchor="ctr">
+                    <a:lnL w="6350" cap="flat" cmpd="sng" algn="ctr">
+                      <a:solidFill>
+                        <a:srgbClr val="D9DEE3"/>
+                      </a:solidFill>
+                      <a:prstDash val="solid"/>
+                      <a:round/>
+                      <a:headEnd type="none" w="med" len="med"/>
+                      <a:tailEnd type="none" w="med" len="med"/>
+                    </a:lnL>
+                    <a:lnR w="6350" cap="flat" cmpd="sng" algn="ctr">
+                      <a:solidFill>
+                        <a:srgbClr val="D9DEE3"/>
+                      </a:solidFill>
+                      <a:prstDash val="solid"/>
+                      <a:round/>
+                      <a:headEnd type="none" w="med" len="med"/>
+                      <a:tailEnd type="none" w="med" len="med"/>
+                    </a:lnR>
+                    <a:lnT w="6350" cap="flat" cmpd="sng" algn="ctr">
+                      <a:solidFill>
+                        <a:srgbClr val="D9DEE3"/>
+                      </a:solidFill>
+                      <a:prstDash val="solid"/>
+                      <a:round/>
+                      <a:headEnd type="none" w="med" len="med"/>
+                      <a:tailEnd type="none" w="med" len="med"/>
+                    </a:lnT>
+                    <a:lnB w="6350" cap="flat" cmpd="sng" algn="ctr">
+                      <a:solidFill>
+                        <a:srgbClr val="D9DEE3"/>
+                      </a:solidFill>
+                      <a:prstDash val="solid"/>
+                      <a:round/>
+                      <a:headEnd type="none" w="med" len="med"/>
+                      <a:tailEnd type="none" w="med" len="med"/>
+                    </a:lnB>
+                    <a:solidFill>
+                      <a:schemeClr val="bg1"/>
+                    </a:solidFill>
+                  </a:tcPr>
+                </a:tc>
+                <a:tc>
+                  <a:txBody>
+                    <a:bodyPr/>
+                    <a:lstStyle/>
+                    <a:p>
+                      <a:pPr marL="0" indent="0">
+                        <a:buNone/>
+                      </a:pPr>
+                      <a:r>
+                        <a:rPr lang="en-US" sz="1300" dirty="0">
+                          <a:solidFill>
+                            <a:schemeClr val="tx1"/>
+                          </a:solidFill>
+                        </a:rPr>
+                        <a:t>GET /health endpoint</a:t>
+                      </a:r>
+                      <a:endParaRPr lang="en-US" sz="1300" dirty="0"/>
+                    </a:p>
+                  </a:txBody>
+                  <a:tcPr anchor="ctr">
+                    <a:lnL w="6350" cap="flat" cmpd="sng" algn="ctr">
+                      <a:solidFill>
+                        <a:srgbClr val="D9DEE3"/>
+                      </a:solidFill>
+                      <a:prstDash val="solid"/>
+                      <a:round/>
+                      <a:headEnd type="none" w="med" len="med"/>
+                      <a:tailEnd type="none" w="med" len="med"/>
+                    </a:lnL>
+                    <a:lnR w="6350" cap="flat" cmpd="sng" algn="ctr">
+                      <a:solidFill>
+                        <a:srgbClr val="D9DEE3"/>
+                      </a:solidFill>
+                      <a:prstDash val="solid"/>
+                      <a:round/>
+                      <a:headEnd type="none" w="med" len="med"/>
+                      <a:tailEnd type="none" w="med" len="med"/>
+                    </a:lnR>
+                    <a:lnT w="6350" cap="flat" cmpd="sng" algn="ctr">
+                      <a:solidFill>
+                        <a:srgbClr val="D9DEE3"/>
+                      </a:solidFill>
+                      <a:prstDash val="solid"/>
+                      <a:round/>
+                      <a:headEnd type="none" w="med" len="med"/>
+                      <a:tailEnd type="none" w="med" len="med"/>
+                    </a:lnT>
+                    <a:lnB w="6350" cap="flat" cmpd="sng" algn="ctr">
+                      <a:solidFill>
+                        <a:srgbClr val="D9DEE3"/>
+                      </a:solidFill>
+                      <a:prstDash val="solid"/>
+                      <a:round/>
+                      <a:headEnd type="none" w="med" len="med"/>
+                      <a:tailEnd type="none" w="med" len="med"/>
+                    </a:lnB>
+                    <a:solidFill>
+                      <a:schemeClr val="bg1"/>
+                    </a:solidFill>
+                  </a:tcPr>
+                </a:tc>
+                <a:tc>
+                  <a:txBody>
+                    <a:bodyPr/>
+                    <a:lstStyle/>
+                    <a:p>
+                      <a:pPr marL="0" indent="0">
+                        <a:buNone/>
+                      </a:pPr>
+                      <a:r>
+                        <a:rPr lang="en-US" sz="1300" dirty="0">
+                          <a:solidFill>
+                            <a:schemeClr val="tx1"/>
+                          </a:solidFill>
+                        </a:rPr>
+                        <a:t>Orders, payments</a:t>
+                      </a:r>
+                      <a:endParaRPr lang="en-US" sz="1300" dirty="0"/>
+                    </a:p>
+                  </a:txBody>
+                  <a:tcPr anchor="ctr">
+                    <a:lnL w="6350" cap="flat" cmpd="sng" algn="ctr">
+                      <a:solidFill>
+                        <a:srgbClr val="D9DEE3"/>
+                      </a:solidFill>
+                      <a:prstDash val="solid"/>
+                      <a:round/>
+                      <a:headEnd type="none" w="med" len="med"/>
+                      <a:tailEnd type="none" w="med" len="med"/>
+                    </a:lnL>
+                    <a:lnR w="6350" cap="flat" cmpd="sng" algn="ctr">
+                      <a:solidFill>
+                        <a:srgbClr val="D9DEE3"/>
+                      </a:solidFill>
+                      <a:prstDash val="solid"/>
+                      <a:round/>
+                      <a:headEnd type="none" w="med" len="med"/>
+                      <a:tailEnd type="none" w="med" len="med"/>
+                    </a:lnR>
+                    <a:lnT w="6350" cap="flat" cmpd="sng" algn="ctr">
+                      <a:solidFill>
+                        <a:srgbClr val="D9DEE3"/>
+                      </a:solidFill>
+                      <a:prstDash val="solid"/>
+                      <a:round/>
+                      <a:headEnd type="none" w="med" len="med"/>
+                      <a:tailEnd type="none" w="med" len="med"/>
+                    </a:lnT>
+                    <a:lnB w="6350" cap="flat" cmpd="sng" algn="ctr">
+                      <a:solidFill>
+                        <a:srgbClr val="D9DEE3"/>
+                      </a:solidFill>
+                      <a:prstDash val="solid"/>
+                      <a:round/>
+                      <a:headEnd type="none" w="med" len="med"/>
+                      <a:tailEnd type="none" w="med" len="med"/>
+                    </a:lnB>
+                    <a:solidFill>
+                      <a:schemeClr val="bg1"/>
+                    </a:solidFill>
+                  </a:tcPr>
+                </a:tc>
+                <a:extLst>
+                  <a:ext uri="{0D108BD9-81ED-4DB2-BD59-A6C34878D82A}">
+                    <a16:rowId xmlns:a16="http://schemas.microsoft.com/office/drawing/2014/main" val="10007"/>
                   </a:ext>
                 </a:extLst>
               </a:tr>
@@ -22098,7 +22148,7 @@
                   <a:schemeClr val="tx2"/>
                 </a:solidFill>
               </a:rPr>
-              <a:t>Stays in each service: models, event contracts, permissions, payment decisions and workflow rules. Refresh sessions stay in Clients.</a:t>
+              <a:t>MongoDB uses its own client, not create_database. Stays in each service: models, contracts, permissions and workflow rules.</a:t>
             </a:r>
             <a:endParaRPr lang="en-US" sz="1300" dirty="0"/>
           </a:p>
@@ -22116,31 +22166,31 @@
         </p:nvSpPr>
         <p:spPr>
           <a:xfrm>
-            <a:off x="11155680" y="6400800"/>
-            <a:ext cx="457200" cy="274320"/>
+            <a:off x="11430000" y="6510528"/>
+            <a:ext cx="502920" cy="274320"/>
           </a:xfrm>
           <a:prstGeom prst="rect">
             <a:avLst/>
           </a:prstGeom>
           <a:extLst>
             <a:ext uri="{C572A759-6A51-4108-AA02-DFA0A04FC94B}">
-              <ma14:wrappingTextBoxFlag xmlns="" xmlns:ma14="http://schemas.microsoft.com/office/mac/drawingml/2011/main" val="0"/>
+              <ma14:wrappingTextBoxFlag xmlns:ma14="http://schemas.microsoft.com/office/mac/drawingml/2011/main" xmlns="" val="0"/>
             </a:ext>
           </a:extLst>
         </p:spPr>
         <p:txBody>
-          <a:bodyPr/>
+          <a:bodyPr anchor="ctr"/>
           <a:lstStyle>
             <a:lvl1pPr>
-              <a:defRPr sz="1000">
+              <a:defRPr sz="1100">
                 <a:solidFill>
-                  <a:schemeClr val="accent4"/>
+                  <a:schemeClr val="bg1"/>
                 </a:solidFill>
               </a:defRPr>
             </a:lvl1pPr>
           </a:lstStyle>
           <a:p>
-            <a:pPr algn="r"/>
+            <a:pPr algn="ctr"/>
             <a:fld id="{F7021451-1387-4CA6-816F-3879F97B5CBC}" type="slidenum">
               <a:rPr lang="en-US" b="0"/>
               <a:t>8</a:t>
@@ -22176,18 +22226,18 @@
       </p:grpSpPr>
       <p:sp>
         <p:nvSpPr>
-          <p:cNvPr id="2" name="Text 0"/>
+          <p:cNvPr id="2" name="Text 1"/>
           <p:cNvSpPr>
             <a:spLocks noGrp="1"/>
           </p:cNvSpPr>
           <p:nvPr>
-            <p:ph type="title" idx="100" hasCustomPrompt="1"/>
+            <p:ph type="title" idx="101" hasCustomPrompt="1"/>
           </p:nvPr>
         </p:nvSpPr>
         <p:spPr>
           <a:xfrm>
-            <a:off x="548640" y="320040"/>
-            <a:ext cx="11064240" cy="822960"/>
+            <a:off x="228600" y="0"/>
+            <a:ext cx="11704320" cy="777240"/>
           </a:xfrm>
           <a:prstGeom prst="rect">
             <a:avLst/>
@@ -22205,7 +22255,7 @@
             <a:r>
               <a:rPr lang="en-US" sz="3000" b="1" dirty="0">
                 <a:solidFill>
-                  <a:schemeClr val="tx1"/>
+                  <a:schemeClr val="bg1"/>
                 </a:solidFill>
               </a:rPr>
               <a:t>Conclusions</a:t>
@@ -22874,31 +22924,31 @@
         </p:nvSpPr>
         <p:spPr>
           <a:xfrm>
-            <a:off x="11155680" y="6400800"/>
-            <a:ext cx="457200" cy="274320"/>
+            <a:off x="11430000" y="6510528"/>
+            <a:ext cx="502920" cy="274320"/>
           </a:xfrm>
           <a:prstGeom prst="rect">
             <a:avLst/>
           </a:prstGeom>
           <a:extLst>
             <a:ext uri="{C572A759-6A51-4108-AA02-DFA0A04FC94B}">
-              <ma14:wrappingTextBoxFlag xmlns="" xmlns:ma14="http://schemas.microsoft.com/office/mac/drawingml/2011/main" val="0"/>
+              <ma14:wrappingTextBoxFlag xmlns:ma14="http://schemas.microsoft.com/office/mac/drawingml/2011/main" xmlns="" val="0"/>
             </a:ext>
           </a:extLst>
         </p:spPr>
         <p:txBody>
-          <a:bodyPr/>
+          <a:bodyPr anchor="ctr"/>
           <a:lstStyle>
             <a:lvl1pPr>
-              <a:defRPr sz="1000">
+              <a:defRPr sz="1100">
                 <a:solidFill>
-                  <a:schemeClr val="accent4"/>
+                  <a:schemeClr val="bg1"/>
                 </a:solidFill>
               </a:defRPr>
             </a:lvl1pPr>
           </a:lstStyle>
           <a:p>
-            <a:pPr algn="r"/>
+            <a:pPr algn="ctr"/>
             <a:fld id="{F7021451-1387-4CA6-816F-3879F97B5CBC}" type="slidenum">
               <a:rPr lang="en-US" b="0"/>
               <a:t>9</a:t>
@@ -22916,9 +22966,9 @@
 </file>
 
 <file path=ppt/theme/theme1.xml><?xml version="1.0" encoding="utf-8"?>
-<a:theme xmlns:a="http://schemas.openxmlformats.org/drawingml/2006/main" name="Manufacturing Events">
+<a:theme xmlns:a="http://schemas.openxmlformats.org/drawingml/2006/main" name="Mondragon Unibertsitatea">
   <a:themeElements>
-    <a:clrScheme name="Manufacturing Events">
+    <a:clrScheme name="Mondragon Unibertsitatea">
       <a:dk1>
         <a:srgbClr val="1F2933"/>
       </a:dk1>
@@ -22932,31 +22982,31 @@
         <a:srgbClr val="F1F3F5"/>
       </a:lt2>
       <a:accent1>
-        <a:srgbClr val="F26B1D"/>
+        <a:srgbClr val="008789"/>
       </a:accent1>
       <a:accent2>
-        <a:srgbClr val="2A9D8F"/>
+        <a:srgbClr val="3D8B40"/>
       </a:accent2>
       <a:accent3>
-        <a:srgbClr val="E9C46A"/>
+        <a:srgbClr val="F5B06A"/>
       </a:accent3>
       <a:accent4>
         <a:srgbClr val="9AA5B1"/>
       </a:accent4>
       <a:accent5>
-        <a:srgbClr val="264653"/>
+        <a:srgbClr val="0B5456"/>
       </a:accent5>
       <a:accent6>
         <a:srgbClr val="D64545"/>
       </a:accent6>
       <a:hlink>
-        <a:srgbClr val="F26B1D"/>
+        <a:srgbClr val="0B6FC2"/>
       </a:hlink>
       <a:folHlink>
         <a:srgbClr val="52606D"/>
       </a:folHlink>
     </a:clrScheme>
-    <a:fontScheme name="Manufacturing Events">
+    <a:fontScheme name="Mondragon Unibertsitatea">
       <a:majorFont>
         <a:latin typeface="Arial"/>
         <a:ea typeface=""/>

--- a/manufacturing_microservices.pptx
+++ b/manufacturing_microservices.pptx
@@ -1665,7 +1665,7 @@
           </a:prstGeom>
           <a:extLst>
             <a:ext uri="{C572A759-6A51-4108-AA02-DFA0A04FC94B}">
-              <ma14:wrappingTextBoxFlag xmlns:ma14="http://schemas.microsoft.com/office/mac/drawingml/2011/main" xmlns="" val="0"/>
+              <ma14:wrappingTextBoxFlag xmlns="" xmlns:ma14="http://schemas.microsoft.com/office/mac/drawingml/2011/main" val="0"/>
             </a:ext>
           </a:extLst>
         </p:spPr>
@@ -1740,7 +1740,7 @@
           </a:prstGeom>
           <a:extLst>
             <a:ext uri="{C572A759-6A51-4108-AA02-DFA0A04FC94B}">
-              <ma14:wrappingTextBoxFlag xmlns:ma14="http://schemas.microsoft.com/office/mac/drawingml/2011/main" xmlns="" val="0"/>
+              <ma14:wrappingTextBoxFlag xmlns="" xmlns:ma14="http://schemas.microsoft.com/office/mac/drawingml/2011/main" val="0"/>
             </a:ext>
           </a:extLst>
         </p:spPr>
@@ -2367,24 +2367,6 @@
                   <a:schemeClr val="tx1"/>
                 </a:solidFill>
               </a:rPr>
-              <a:t>Move secrets and certificates out of the repository</a:t>
-            </a:r>
-            <a:endParaRPr lang="en-US" sz="1400" dirty="0"/>
-          </a:p>
-          <a:p>
-            <a:pPr marL="342900" indent="-342900">
-              <a:spcAft>
-                <a:spcPts val="800"/>
-              </a:spcAft>
-              <a:buSzPct val="100000"/>
-              <a:buChar char="•"/>
-            </a:pPr>
-            <a:r>
-              <a:rPr lang="en-US" sz="1400" dirty="0">
-                <a:solidFill>
-                  <a:schemeClr val="tx1"/>
-                </a:solidFill>
-              </a:rPr>
               <a:t>Protect the remaining read routes</a:t>
             </a:r>
             <a:endParaRPr lang="en-US" sz="1400" dirty="0"/>
@@ -2753,24 +2735,6 @@
                   <a:schemeClr val="tx1"/>
                 </a:solidFill>
               </a:rPr>
-              <a:t>Publish catalogue and key snapshots only when they change</a:t>
-            </a:r>
-            <a:endParaRPr lang="en-US" sz="1400" dirty="0"/>
-          </a:p>
-          <a:p>
-            <a:pPr marL="342900" indent="-342900">
-              <a:spcAft>
-                <a:spcPts val="800"/>
-              </a:spcAft>
-              <a:buSzPct val="100000"/>
-              <a:buChar char="•"/>
-            </a:pPr>
-            <a:r>
-              <a:rPr lang="en-US" sz="1400" dirty="0">
-                <a:solidFill>
-                  <a:schemeClr val="tx1"/>
-                </a:solidFill>
-              </a:rPr>
               <a:t>Clean up old outbox and inbox rows</a:t>
             </a:r>
             <a:endParaRPr lang="en-US" sz="1400" dirty="0"/>
@@ -2955,25 +2919,15 @@
                   <a:schemeClr val="tx1"/>
                 </a:solidFill>
               </a:rPr>
-              <a:t>Restore broader test coverage</a:t>
+              <a:t>Restore broader </a:t>
             </a:r>
-            <a:endParaRPr lang="en-US" sz="1400" dirty="0"/>
-          </a:p>
-          <a:p>
-            <a:pPr marL="342900" indent="-342900">
-              <a:spcAft>
-                <a:spcPts val="800"/>
-              </a:spcAft>
-              <a:buSzPct val="100000"/>
-              <a:buChar char="•"/>
-            </a:pPr>
             <a:r>
-              <a:rPr lang="en-US" sz="1400" dirty="0">
+              <a:rPr lang="en-US" sz="1400">
                 <a:solidFill>
                   <a:schemeClr val="tx1"/>
                 </a:solidFill>
               </a:rPr>
-              <a:t>Monitoring and tests in CI</a:t>
+              <a:t>test coverage</a:t>
             </a:r>
             <a:endParaRPr lang="en-US" sz="1400" dirty="0"/>
           </a:p>
@@ -2999,7 +2953,7 @@
           </a:prstGeom>
           <a:extLst>
             <a:ext uri="{C572A759-6A51-4108-AA02-DFA0A04FC94B}">
-              <ma14:wrappingTextBoxFlag xmlns:ma14="http://schemas.microsoft.com/office/mac/drawingml/2011/main" xmlns="" val="0"/>
+              <ma14:wrappingTextBoxFlag xmlns="" xmlns:ma14="http://schemas.microsoft.com/office/mac/drawingml/2011/main" val="0"/>
             </a:ext>
           </a:extLst>
         </p:spPr>
@@ -4468,7 +4422,7 @@
           </a:prstGeom>
           <a:extLst>
             <a:ext uri="{C572A759-6A51-4108-AA02-DFA0A04FC94B}">
-              <ma14:wrappingTextBoxFlag xmlns:ma14="http://schemas.microsoft.com/office/mac/drawingml/2011/main" xmlns="" val="0"/>
+              <ma14:wrappingTextBoxFlag xmlns="" xmlns:ma14="http://schemas.microsoft.com/office/mac/drawingml/2011/main" val="0"/>
             </a:ext>
           </a:extLst>
         </p:spPr>
@@ -10443,7 +10397,7 @@
           </a:prstGeom>
           <a:extLst>
             <a:ext uri="{C572A759-6A51-4108-AA02-DFA0A04FC94B}">
-              <ma14:wrappingTextBoxFlag xmlns:ma14="http://schemas.microsoft.com/office/mac/drawingml/2011/main" xmlns="" val="0"/>
+              <ma14:wrappingTextBoxFlag xmlns="" xmlns:ma14="http://schemas.microsoft.com/office/mac/drawingml/2011/main" val="0"/>
             </a:ext>
           </a:extLst>
         </p:spPr>
@@ -10649,7 +10603,7 @@
         </p:nvGraphicFramePr>
         <p:xfrm>
           <a:off x="548640" y="1920240"/>
-          <a:ext cx="6309360" cy="914400"/>
+          <a:ext cx="6309360" cy="3968496"/>
         </p:xfrm>
         <a:graphic>
           <a:graphicData uri="http://schemas.openxmlformats.org/drawingml/2006/table">
@@ -14410,7 +14364,7 @@
         </p:nvGraphicFramePr>
         <p:xfrm>
           <a:off x="7132320" y="1920240"/>
-          <a:ext cx="4480560" cy="914400"/>
+          <a:ext cx="4480560" cy="1984248"/>
         </p:xfrm>
         <a:graphic>
           <a:graphicData uri="http://schemas.openxmlformats.org/drawingml/2006/table">
@@ -16251,90 +16205,6 @@
       </p:graphicFrame>
       <p:sp>
         <p:nvSpPr>
-          <p:cNvPr id="11" name="Endpoint note card"/>
-          <p:cNvSpPr/>
-          <p:nvPr/>
-        </p:nvSpPr>
-        <p:spPr>
-          <a:xfrm>
-            <a:off x="7132320" y="4160520"/>
-            <a:ext cx="4480560" cy="1783080"/>
-          </a:xfrm>
-          <a:prstGeom prst="roundRect">
-            <a:avLst>
-              <a:gd name="adj" fmla="val 6154"/>
-            </a:avLst>
-          </a:prstGeom>
-          <a:solidFill>
-            <a:schemeClr val="bg2"/>
-          </a:solidFill>
-          <a:ln w="12700">
-            <a:solidFill>
-              <a:schemeClr val="bg2"/>
-            </a:solidFill>
-            <a:prstDash val="solid"/>
-          </a:ln>
-        </p:spPr>
-        <p:txBody>
-          <a:bodyPr/>
-          <a:lstStyle/>
-          <a:p>
-            <a:endParaRPr lang="es-ES"/>
-          </a:p>
-        </p:txBody>
-      </p:sp>
-      <p:sp>
-        <p:nvSpPr>
-          <p:cNvPr id="12" name="Legacy note"/>
-          <p:cNvSpPr txBox="1"/>
-          <p:nvPr/>
-        </p:nvSpPr>
-        <p:spPr>
-          <a:xfrm>
-            <a:off x="7360920" y="4251960"/>
-            <a:ext cx="4023360" cy="1600200"/>
-          </a:xfrm>
-          <a:prstGeom prst="rect">
-            <a:avLst/>
-          </a:prstGeom>
-          <a:noFill/>
-          <a:ln/>
-        </p:spPr>
-        <p:txBody>
-          <a:bodyPr wrap="square" rtlCol="0" anchor="ctr"/>
-          <a:lstStyle/>
-          <a:p>
-            <a:pPr marL="0" indent="0">
-              <a:buNone/>
-            </a:pPr>
-            <a:r>
-              <a:rPr lang="en-US" sz="1500" b="1" dirty="0">
-                <a:solidFill>
-                  <a:schemeClr val="tx1"/>
-                </a:solidFill>
-              </a:rPr>
-              <a:t>Legacy endpoints</a:t>
-            </a:r>
-            <a:endParaRPr lang="en-US" sz="1500" dirty="0"/>
-          </a:p>
-          <a:p>
-            <a:pPr marL="0" indent="0">
-              <a:buNone/>
-            </a:pPr>
-            <a:r>
-              <a:rPr lang="en-US" sz="1300" dirty="0">
-                <a:solidFill>
-                  <a:schemeClr val="tx1"/>
-                </a:solidFill>
-              </a:rPr>
-              <a:t>PATCH /piece/{id}, PATCH /order/{id}/payment and /piece/by-status are kept for compatibility; that information now arrives as RabbitMQ facts.</a:t>
-            </a:r>
-            <a:endParaRPr lang="en-US" sz="1500" dirty="0"/>
-          </a:p>
-        </p:txBody>
-      </p:sp>
-      <p:sp>
-        <p:nvSpPr>
           <p:cNvPr id="25" name="Slide Number Placeholder 0"/>
           <p:cNvSpPr>
             <a:spLocks noGrp="1"/>
@@ -16353,7 +16223,7 @@
           </a:prstGeom>
           <a:extLst>
             <a:ext uri="{C572A759-6A51-4108-AA02-DFA0A04FC94B}">
-              <ma14:wrappingTextBoxFlag xmlns:ma14="http://schemas.microsoft.com/office/mac/drawingml/2011/main" xmlns="" val="0"/>
+              <ma14:wrappingTextBoxFlag xmlns="" xmlns:ma14="http://schemas.microsoft.com/office/mac/drawingml/2011/main" val="0"/>
             </a:ext>
           </a:extLst>
         </p:spPr>
@@ -16487,7 +16357,7 @@
           </a:prstGeom>
           <a:extLst>
             <a:ext uri="{C572A759-6A51-4108-AA02-DFA0A04FC94B}">
-              <ma14:wrappingTextBoxFlag xmlns:ma14="http://schemas.microsoft.com/office/mac/drawingml/2011/main" xmlns="" val="0"/>
+              <ma14:wrappingTextBoxFlag xmlns="" xmlns:ma14="http://schemas.microsoft.com/office/mac/drawingml/2011/main" val="0"/>
             </a:ext>
           </a:extLst>
         </p:spPr>
@@ -16593,7 +16463,7 @@
         </p:nvGraphicFramePr>
         <p:xfrm>
           <a:off x="548640" y="1280160"/>
-          <a:ext cx="7772400" cy="914400"/>
+          <a:ext cx="7772400" cy="4358640"/>
         </p:xfrm>
         <a:graphic>
           <a:graphicData uri="http://schemas.openxmlformats.org/drawingml/2006/table">
@@ -19128,7 +18998,7 @@
           </a:prstGeom>
           <a:extLst>
             <a:ext uri="{C572A759-6A51-4108-AA02-DFA0A04FC94B}">
-              <ma14:wrappingTextBoxFlag xmlns:ma14="http://schemas.microsoft.com/office/mac/drawingml/2011/main" xmlns="" val="0"/>
+              <ma14:wrappingTextBoxFlag xmlns="" xmlns:ma14="http://schemas.microsoft.com/office/mac/drawingml/2011/main" val="0"/>
             </a:ext>
           </a:extLst>
         </p:spPr>
@@ -20246,7 +20116,7 @@
           </a:prstGeom>
           <a:extLst>
             <a:ext uri="{C572A759-6A51-4108-AA02-DFA0A04FC94B}">
-              <ma14:wrappingTextBoxFlag xmlns:ma14="http://schemas.microsoft.com/office/mac/drawingml/2011/main" xmlns="" val="0"/>
+              <ma14:wrappingTextBoxFlag xmlns="" xmlns:ma14="http://schemas.microsoft.com/office/mac/drawingml/2011/main" val="0"/>
             </a:ext>
           </a:extLst>
         </p:spPr>
@@ -22174,7 +22044,7 @@
           </a:prstGeom>
           <a:extLst>
             <a:ext uri="{C572A759-6A51-4108-AA02-DFA0A04FC94B}">
-              <ma14:wrappingTextBoxFlag xmlns:ma14="http://schemas.microsoft.com/office/mac/drawingml/2011/main" xmlns="" val="0"/>
+              <ma14:wrappingTextBoxFlag xmlns="" xmlns:ma14="http://schemas.microsoft.com/office/mac/drawingml/2011/main" val="0"/>
             </a:ext>
           </a:extLst>
         </p:spPr>
@@ -22932,7 +22802,7 @@
           </a:prstGeom>
           <a:extLst>
             <a:ext uri="{C572A759-6A51-4108-AA02-DFA0A04FC94B}">
-              <ma14:wrappingTextBoxFlag xmlns:ma14="http://schemas.microsoft.com/office/mac/drawingml/2011/main" xmlns="" val="0"/>
+              <ma14:wrappingTextBoxFlag xmlns="" xmlns:ma14="http://schemas.microsoft.com/office/mac/drawingml/2011/main" val="0"/>
             </a:ext>
           </a:extLst>
         </p:spPr>
